--- a/2026-03-14_늘푸른교회_.pptx
+++ b/2026-03-14_늘푸른교회_.pptx
@@ -182,6 +182,8 @@
     <p:sldId id="430" r:id="rId181"/>
     <p:sldId id="431" r:id="rId182"/>
     <p:sldId id="432" r:id="rId183"/>
+    <p:sldId id="433" r:id="rId184"/>
+    <p:sldId id="434" r:id="rId185"/>
   </p:sldIdLst>
   <p:sldSz cx="12192119" cy="6858000" type="screen4x3"/>
   <p:notesSz cx="6858000" cy="9144000"/>
@@ -3417,11 +3419,7 @@
               </a:defRPr>
             </a:pPr>
             <a:r>
-              <a:t>이스라엘 자손에게 명령하여 돌이켜 바다와 믹돌 사이의 비하히롯 앞 곧</a:t>
-            </a:r>
-            <a:br/>
-            <a:r>
-              <a:t>바알스본 맞은편 바닷가에 장막을 치게 하라</a:t>
+              <a:t>그러나 너를 책망할 것이 있나니 너의 처음 사랑을 버렸느니라</a:t>
             </a:r>
           </a:p>
         </p:txBody>
@@ -3459,7 +3457,7 @@
               </a:defRPr>
             </a:pPr>
             <a:r>
-              <a:t>출14:2</a:t>
+              <a:t>계2:4</a:t>
             </a:r>
           </a:p>
         </p:txBody>
@@ -3549,15 +3547,11 @@
               </a:defRPr>
             </a:pPr>
             <a:r>
-              <a:t>내가 바로의 마음을 완악하게 한즉 바로가 그들의 뒤를 따르리니 내가 그와</a:t>
+              <a:t>하나님께 가까이 함이 내게 복이라 내가 주 여호와를 나의 피난처로 삼아 주의</a:t>
             </a:r>
             <a:br/>
             <a:r>
-              <a:t>그의 온 군대로 말미암아 영광을 얻어 애굽 사람들이 나를 여호와인 줄 알게</a:t>
-            </a:r>
-            <a:br/>
-            <a:r>
-              <a:t>하리라 하시매 무리가 그대로 행하니라</a:t>
+              <a:t>모든 행적을 전파하리이다</a:t>
             </a:r>
           </a:p>
         </p:txBody>
@@ -3595,7 +3589,7 @@
               </a:defRPr>
             </a:pPr>
             <a:r>
-              <a:t>출14:4</a:t>
+              <a:t>시73:28</a:t>
             </a:r>
           </a:p>
         </p:txBody>
@@ -3635,6 +3629,146 @@
 </file>
 
 <file path=ppt/slides/slide104.xml><?xml version="1.0" encoding="utf-8"?>
+<p:sld xmlns:a="http://schemas.openxmlformats.org/drawingml/2006/main" xmlns:p="http://schemas.openxmlformats.org/presentationml/2006/main" xmlns:r="http://schemas.openxmlformats.org/officeDocument/2006/relationships">
+  <p:cSld>
+    <p:bg>
+      <p:bgPr>
+        <a:solidFill>
+          <a:srgbClr val="00FF00"/>
+        </a:solidFill>
+        <a:effectLst/>
+      </p:bgPr>
+    </p:bg>
+    <p:spTree>
+      <p:nvGrpSpPr>
+        <p:cNvPr id="1" name=""/>
+        <p:cNvGrpSpPr/>
+        <p:nvPr/>
+      </p:nvGrpSpPr>
+      <p:grpSpPr/>
+      <p:sp>
+        <p:nvSpPr>
+          <p:cNvPr id="2" name="TextBox 1"/>
+          <p:cNvSpPr txBox="1"/>
+          <p:nvPr/>
+        </p:nvSpPr>
+        <p:spPr>
+          <a:xfrm>
+            <a:off x="0" y="5058000"/>
+            <a:ext cx="12193200" cy="1692000"/>
+          </a:xfrm>
+          <a:prstGeom prst="rect">
+            <a:avLst/>
+          </a:prstGeom>
+          <a:solidFill>
+            <a:srgbClr val="203864"/>
+          </a:solidFill>
+        </p:spPr>
+        <p:txBody>
+          <a:bodyPr wrap="none" anchor="ctr">
+            <a:normAutofit/>
+          </a:bodyPr>
+          <a:lstStyle/>
+          <a:p>
+            <a:pPr algn="l">
+              <a:defRPr sz="3000">
+                <a:solidFill>
+                  <a:srgbClr val="FFFFFF"/>
+                </a:solidFill>
+                <a:latin typeface="Pretendard Semibold"/>
+              </a:defRPr>
+            </a:pPr>
+            <a:r>
+              <a:t>룻이 이르되 내게 어머니를 떠나며 어머니를 따르지 말고 돌아가라 강권하지</a:t>
+            </a:r>
+            <a:br/>
+            <a:r>
+              <a:t>마옵소서 어머니께서 가시는 곳에 나도 가고 어머니께서 머무시는 곳에서 나도</a:t>
+            </a:r>
+            <a:br/>
+            <a:r>
+              <a:t>머물겠나이다 어머니의 백성이 나의 백성이 되고 어머니의 하나님이 나의</a:t>
+            </a:r>
+            <a:br/>
+            <a:r>
+              <a:t>하나님이 되시리니</a:t>
+            </a:r>
+          </a:p>
+        </p:txBody>
+      </p:sp>
+      <p:sp>
+        <p:nvSpPr>
+          <p:cNvPr id="3" name="TextBox 2"/>
+          <p:cNvSpPr txBox="1"/>
+          <p:nvPr/>
+        </p:nvSpPr>
+        <p:spPr>
+          <a:xfrm>
+            <a:off x="0" y="4518000"/>
+            <a:ext cx="2880000" cy="540000"/>
+          </a:xfrm>
+          <a:prstGeom prst="rect">
+            <a:avLst/>
+          </a:prstGeom>
+          <a:solidFill>
+            <a:srgbClr val="FFFFFF"/>
+          </a:solidFill>
+        </p:spPr>
+        <p:txBody>
+          <a:bodyPr wrap="none" anchor="ctr">
+            <a:normAutofit/>
+          </a:bodyPr>
+          <a:lstStyle/>
+          <a:p>
+            <a:pPr algn="ctr">
+              <a:defRPr sz="2400">
+                <a:solidFill>
+                  <a:srgbClr val="000000"/>
+                </a:solidFill>
+                <a:latin typeface="Pretendard Black"/>
+              </a:defRPr>
+            </a:pPr>
+            <a:r>
+              <a:t>룻1:16</a:t>
+            </a:r>
+          </a:p>
+        </p:txBody>
+      </p:sp>
+    </p:spTree>
+  </p:cSld>
+  <p:clrMapOvr>
+    <a:masterClrMapping/>
+  </p:clrMapOvr>
+</p:sld>
+</file>
+
+<file path=ppt/slides/slide105.xml><?xml version="1.0" encoding="utf-8"?>
+<p:sld xmlns:a="http://schemas.openxmlformats.org/drawingml/2006/main" xmlns:p="http://schemas.openxmlformats.org/presentationml/2006/main" xmlns:r="http://schemas.openxmlformats.org/officeDocument/2006/relationships">
+  <p:cSld>
+    <p:bg>
+      <p:bgPr>
+        <a:solidFill>
+          <a:srgbClr val="00FF00"/>
+        </a:solidFill>
+        <a:effectLst/>
+      </p:bgPr>
+    </p:bg>
+    <p:spTree>
+      <p:nvGrpSpPr>
+        <p:cNvPr id="1" name=""/>
+        <p:cNvGrpSpPr/>
+        <p:nvPr/>
+      </p:nvGrpSpPr>
+      <p:grpSpPr/>
+    </p:spTree>
+  </p:cSld>
+  <p:clrMapOvr>
+    <a:masterClrMapping/>
+  </p:clrMapOvr>
+</p:sld>
+</file>
+
+<file path=ppt/slides/slide106.xml><?xml version="1.0" encoding="utf-8"?>
 <p:sld xmlns:a="http://schemas.openxmlformats.org/drawingml/2006/main" xmlns:p="http://schemas.openxmlformats.org/presentationml/2006/main" xmlns:r="http://schemas.openxmlformats.org/officeDocument/2006/relationships">
   <p:cSld>
     <p:bg>
@@ -3685,7 +3819,11 @@
               </a:defRPr>
             </a:pPr>
             <a:r>
-              <a:t>네 길을 여호와께 맡기라 그를 의지하면 그가 이루시고</a:t>
+              <a:t>이는 여호와께서 강대한 나라들을 너희의 앞에서 쫓아내셨으므로 오늘까지</a:t>
+            </a:r>
+            <a:br/>
+            <a:r>
+              <a:t>너희에게 맞선 자가 하나도 없었느니라</a:t>
             </a:r>
           </a:p>
         </p:txBody>
@@ -3723,46 +3861,20 @@
               </a:defRPr>
             </a:pPr>
             <a:r>
-              <a:t>시37:5</a:t>
-            </a:r>
-          </a:p>
-        </p:txBody>
-      </p:sp>
-    </p:spTree>
-  </p:cSld>
-  <p:clrMapOvr>
-    <a:masterClrMapping/>
-  </p:clrMapOvr>
-</p:sld>
-</file>
-
-<file path=ppt/slides/slide105.xml><?xml version="1.0" encoding="utf-8"?>
-<p:sld xmlns:a="http://schemas.openxmlformats.org/drawingml/2006/main" xmlns:p="http://schemas.openxmlformats.org/presentationml/2006/main" xmlns:r="http://schemas.openxmlformats.org/officeDocument/2006/relationships">
-  <p:cSld>
-    <p:bg>
-      <p:bgPr>
-        <a:solidFill>
-          <a:srgbClr val="00FF00"/>
-        </a:solidFill>
-        <a:effectLst/>
-      </p:bgPr>
-    </p:bg>
-    <p:spTree>
-      <p:nvGrpSpPr>
-        <p:cNvPr id="1" name=""/>
-        <p:cNvGrpSpPr/>
-        <p:nvPr/>
-      </p:nvGrpSpPr>
-      <p:grpSpPr/>
-    </p:spTree>
-  </p:cSld>
-  <p:clrMapOvr>
-    <a:masterClrMapping/>
-  </p:clrMapOvr>
-</p:sld>
-</file>
-
-<file path=ppt/slides/slide106.xml><?xml version="1.0" encoding="utf-8"?>
+              <a:t>수23:9</a:t>
+            </a:r>
+          </a:p>
+        </p:txBody>
+      </p:sp>
+    </p:spTree>
+  </p:cSld>
+  <p:clrMapOvr>
+    <a:masterClrMapping/>
+  </p:clrMapOvr>
+</p:sld>
+</file>
+
+<file path=ppt/slides/slide107.xml><?xml version="1.0" encoding="utf-8"?>
 <p:sld xmlns:a="http://schemas.openxmlformats.org/drawingml/2006/main" xmlns:p="http://schemas.openxmlformats.org/presentationml/2006/main" xmlns:r="http://schemas.openxmlformats.org/officeDocument/2006/relationships">
   <p:cSld>
     <p:bg>
@@ -3813,11 +3925,11 @@
               </a:defRPr>
             </a:pPr>
             <a:r>
-              <a:t>그러나 내가 가는 길을 그가 아시나니 그가 나를 단련하신 후에는 내가 순금</a:t>
+              <a:t>너희 중 한 사람이 천 명을 쫓으리니 이는 너희의 하나님 여호와 그가</a:t>
             </a:r>
             <a:br/>
             <a:r>
-              <a:t>같이 되어 나오리라</a:t>
+              <a:t>너희에게 말씀하신 것 같이 너희를 위하여 싸우심이라</a:t>
             </a:r>
           </a:p>
         </p:txBody>
@@ -3855,37 +3967,11 @@
               </a:defRPr>
             </a:pPr>
             <a:r>
-              <a:t>욥23:10</a:t>
-            </a:r>
-          </a:p>
-        </p:txBody>
-      </p:sp>
-    </p:spTree>
-  </p:cSld>
-  <p:clrMapOvr>
-    <a:masterClrMapping/>
-  </p:clrMapOvr>
-</p:sld>
-</file>
-
-<file path=ppt/slides/slide107.xml><?xml version="1.0" encoding="utf-8"?>
-<p:sld xmlns:a="http://schemas.openxmlformats.org/drawingml/2006/main" xmlns:p="http://schemas.openxmlformats.org/presentationml/2006/main" xmlns:r="http://schemas.openxmlformats.org/officeDocument/2006/relationships">
-  <p:cSld>
-    <p:bg>
-      <p:bgPr>
-        <a:solidFill>
-          <a:srgbClr val="00FF00"/>
-        </a:solidFill>
-        <a:effectLst/>
-      </p:bgPr>
-    </p:bg>
-    <p:spTree>
-      <p:nvGrpSpPr>
-        <p:cNvPr id="1" name=""/>
-        <p:cNvGrpSpPr/>
-        <p:nvPr/>
-      </p:nvGrpSpPr>
-      <p:grpSpPr/>
+              <a:t>수23:10</a:t>
+            </a:r>
+          </a:p>
+        </p:txBody>
+      </p:sp>
     </p:spTree>
   </p:cSld>
   <p:clrMapOvr>
@@ -3895,6 +3981,32 @@
 </file>
 
 <file path=ppt/slides/slide108.xml><?xml version="1.0" encoding="utf-8"?>
+<p:sld xmlns:a="http://schemas.openxmlformats.org/drawingml/2006/main" xmlns:p="http://schemas.openxmlformats.org/presentationml/2006/main" xmlns:r="http://schemas.openxmlformats.org/officeDocument/2006/relationships">
+  <p:cSld>
+    <p:bg>
+      <p:bgPr>
+        <a:solidFill>
+          <a:srgbClr val="00FF00"/>
+        </a:solidFill>
+        <a:effectLst/>
+      </p:bgPr>
+    </p:bg>
+    <p:spTree>
+      <p:nvGrpSpPr>
+        <p:cNvPr id="1" name=""/>
+        <p:cNvGrpSpPr/>
+        <p:nvPr/>
+      </p:nvGrpSpPr>
+      <p:grpSpPr/>
+    </p:spTree>
+  </p:cSld>
+  <p:clrMapOvr>
+    <a:masterClrMapping/>
+  </p:clrMapOvr>
+</p:sld>
+</file>
+
+<file path=ppt/slides/slide109.xml><?xml version="1.0" encoding="utf-8"?>
 <p:sld xmlns:a="http://schemas.openxmlformats.org/drawingml/2006/main" xmlns:p="http://schemas.openxmlformats.org/presentationml/2006/main" xmlns:r="http://schemas.openxmlformats.org/officeDocument/2006/relationships">
   <p:cSld>
     <p:bg>
@@ -3945,15 +4057,11 @@
               </a:defRPr>
             </a:pPr>
             <a:r>
-              <a:t>그들이 또 모세에게 이르되 애굽에 매장지가 없어서 당신이 우리를 이끌어 내어</a:t>
+              <a:t>그러나 네가 마음에 이르기를 내 능력과 내 손의 힘으로 내가 이 재물을</a:t>
             </a:r>
             <a:br/>
             <a:r>
-              <a:t>이 광야에서 죽게 하느냐 어찌하여 당신이 우리를 애굽에서 이끌어 내어</a:t>
-            </a:r>
-            <a:br/>
-            <a:r>
-              <a:t>우리에게 이같이 하느냐</a:t>
+              <a:t>얻었다 말할 것이라</a:t>
             </a:r>
           </a:p>
         </p:txBody>
@@ -3991,37 +4099,11 @@
               </a:defRPr>
             </a:pPr>
             <a:r>
-              <a:t>출14:11</a:t>
-            </a:r>
-          </a:p>
-        </p:txBody>
-      </p:sp>
-    </p:spTree>
-  </p:cSld>
-  <p:clrMapOvr>
-    <a:masterClrMapping/>
-  </p:clrMapOvr>
-</p:sld>
-</file>
-
-<file path=ppt/slides/slide109.xml><?xml version="1.0" encoding="utf-8"?>
-<p:sld xmlns:a="http://schemas.openxmlformats.org/drawingml/2006/main" xmlns:p="http://schemas.openxmlformats.org/presentationml/2006/main" xmlns:r="http://schemas.openxmlformats.org/officeDocument/2006/relationships">
-  <p:cSld>
-    <p:bg>
-      <p:bgPr>
-        <a:solidFill>
-          <a:srgbClr val="00FF00"/>
-        </a:solidFill>
-        <a:effectLst/>
-      </p:bgPr>
-    </p:bg>
-    <p:spTree>
-      <p:nvGrpSpPr>
-        <p:cNvPr id="1" name=""/>
-        <p:cNvGrpSpPr/>
-        <p:nvPr/>
-      </p:nvGrpSpPr>
-      <p:grpSpPr/>
+              <a:t>신8:17</a:t>
+            </a:r>
+          </a:p>
+        </p:txBody>
+      </p:sp>
     </p:spTree>
   </p:cSld>
   <p:clrMapOvr>
@@ -4164,15 +4246,11 @@
               </a:defRPr>
             </a:pPr>
             <a:r>
-              <a:t>자기 자신은 광야로 들어가 하룻길쯤 가서 한 로뎀 나무 아래에 앉아서 자기가</a:t>
+              <a:t>네 하나님 여호와를 기억하라 그가 네게 재물 얻을 능력을 주셨음이라 이같이</a:t>
             </a:r>
             <a:br/>
             <a:r>
-              <a:t>죽기를 원하여 이르되 여호와여 넉넉하오니 지금 내 생명을 거두시옵소서 나는</a:t>
-            </a:r>
-            <a:br/>
-            <a:r>
-              <a:t>내 조상들보다 낫지 못하니이다 하고</a:t>
+              <a:t>하심은 네 조상들에게 맹세하신 언약을 오늘과 같이 이루려 하심이니라</a:t>
             </a:r>
           </a:p>
         </p:txBody>
@@ -4210,7 +4288,7 @@
               </a:defRPr>
             </a:pPr>
             <a:r>
-              <a:t>왕상19:4</a:t>
+              <a:t>신8:18</a:t>
             </a:r>
           </a:p>
         </p:txBody>
@@ -4300,15 +4378,11 @@
               </a:defRPr>
             </a:pPr>
             <a:r>
-              <a:t>모세가 백성에게 이르되 너희는 두려워하지 말고 가만히 서서 여호와께서 오늘</a:t>
+              <a:t>또 여호와의 구원하심이 칼과 창에 있지 아니함을 이 무리에게 알게 하리라</a:t>
             </a:r>
             <a:br/>
             <a:r>
-              <a:t>너희를 위하여 행하시는 구원을 보라 너희가 오늘 본 애굽 사람을 영원히 다시</a:t>
-            </a:r>
-            <a:br/>
-            <a:r>
-              <a:t>보지 아니하리라</a:t>
+              <a:t>전쟁은 여호와께 속한 것인즉 그가 너희를 우리 손에 넘기시리라</a:t>
             </a:r>
           </a:p>
         </p:txBody>
@@ -4346,7 +4420,7 @@
               </a:defRPr>
             </a:pPr>
             <a:r>
-              <a:t>출14:13</a:t>
+              <a:t>삼상17:47</a:t>
             </a:r>
           </a:p>
         </p:txBody>
@@ -4436,11 +4510,7 @@
               </a:defRPr>
             </a:pPr>
             <a:r>
-              <a:t>모세가 바다 위로 손을 내밀매 여호와께서 큰 동풍이 밤새도록 바닷물을</a:t>
-            </a:r>
-            <a:br/>
-            <a:r>
-              <a:t>물러가게 하시니 물이 갈라져 바다가 마른 땅이 된지라</a:t>
+              <a:t>여호와께서 너희를 위하여 싸우시리니 너희는 가만히 있을지니라</a:t>
             </a:r>
           </a:p>
         </p:txBody>
@@ -4478,7 +4548,7 @@
               </a:defRPr>
             </a:pPr>
             <a:r>
-              <a:t>출14:21</a:t>
+              <a:t>출14:14</a:t>
             </a:r>
           </a:p>
         </p:txBody>
@@ -4568,11 +4638,11 @@
               </a:defRPr>
             </a:pPr>
             <a:r>
-              <a:t>믿음으로 그들은 홍해를 육지 같이 건넜으나 애굽 사람들은 이것을 시험하다가</a:t>
+              <a:t>나는 포도나무요 너희는 가지라 그가 내 안에, 내가 그 안에 거하면 사람이</a:t>
             </a:r>
             <a:br/>
             <a:r>
-              <a:t>빠져 죽었으며</a:t>
+              <a:t>열매를 많이 맺나니 나를 떠나서는 너희가 아무 것도 할 수 없음이라</a:t>
             </a:r>
           </a:p>
         </p:txBody>
@@ -4610,7 +4680,7 @@
               </a:defRPr>
             </a:pPr>
             <a:r>
-              <a:t>히11:29</a:t>
+              <a:t>요15:5</a:t>
             </a:r>
           </a:p>
         </p:txBody>
@@ -4700,11 +4770,7 @@
               </a:defRPr>
             </a:pPr>
             <a:r>
-              <a:t>온 땅의 주 여호와의 궤를 멘 제사장들의 발바닥이 요단 물을 밟고 멈추면</a:t>
-            </a:r>
-            <a:br/>
-            <a:r>
-              <a:t>요단 물 곧 위에서부터 흘러내리던 물이 끊어지고 한 곳에 쌓여 서리라</a:t>
+              <a:t>그러므로 스스로 조심하여 너희의 하나님 여호와를 사랑하라</a:t>
             </a:r>
           </a:p>
         </p:txBody>
@@ -4742,7 +4808,7 @@
               </a:defRPr>
             </a:pPr>
             <a:r>
-              <a:t>수3:13</a:t>
+              <a:t>수23:11</a:t>
             </a:r>
           </a:p>
         </p:txBody>
@@ -4915,7 +4981,11 @@
               </a:defRPr>
             </a:pPr>
             <a:r>
-              <a:t>오라 하시니 베드로가 배에서 내려 물 위로 걸어서 예수께로 가되</a:t>
+              <a:t>예수께서 이르시되 네 마음을 다하고 목숨을 다하고 뜻을 다하여 주 너의</a:t>
+            </a:r>
+            <a:br/>
+            <a:r>
+              <a:t>하나님을 사랑하라 하셨으니</a:t>
             </a:r>
           </a:p>
         </p:txBody>
@@ -4953,7 +5023,7 @@
               </a:defRPr>
             </a:pPr>
             <a:r>
-              <a:t>마14:29</a:t>
+              <a:t>마22:37</a:t>
             </a:r>
           </a:p>
         </p:txBody>
@@ -5043,7 +5113,7 @@
               </a:defRPr>
             </a:pPr>
             <a:r>
-              <a:t>여호와께서 너희를 위하여 싸우시리니 너희는 가만히 있을지니라</a:t>
+              <a:t>너희가 나를 사랑하면 나의 계명을 지키리라</a:t>
             </a:r>
           </a:p>
         </p:txBody>
@@ -5081,7 +5151,7 @@
               </a:defRPr>
             </a:pPr>
             <a:r>
-              <a:t>출14:14</a:t>
+              <a:t>요14:15</a:t>
             </a:r>
           </a:p>
         </p:txBody>
@@ -5171,11 +5241,7 @@
               </a:defRPr>
             </a:pPr>
             <a:r>
-              <a:t>슬프도소이다 주 여호와여 주께서 큰 능력과 펴신 팔로 천지를 지으셨사오니</a:t>
-            </a:r>
-            <a:br/>
-            <a:r>
-              <a:t>주에게는 할 수 없는 일이 없으시니이다</a:t>
+              <a:t>오직 여호와의 율법을 즐거워하여 그의 율법을 주야로 묵상하는도다</a:t>
             </a:r>
           </a:p>
         </p:txBody>
@@ -5213,7 +5279,7 @@
               </a:defRPr>
             </a:pPr>
             <a:r>
-              <a:t>렘32:17</a:t>
+              <a:t>시1:2</a:t>
             </a:r>
           </a:p>
         </p:txBody>
@@ -5303,11 +5369,11 @@
               </a:defRPr>
             </a:pPr>
             <a:r>
-              <a:t>나 여호와는 변하지 아니하나니 그러므로 야곱의 자손들아 너희가 소멸되지</a:t>
+              <a:t>새벽 아직도 밝기 전에 예수께서 일어나 나가 한적한 곳으로 가사 거기서</a:t>
             </a:r>
             <a:br/>
             <a:r>
-              <a:t>아니하느니라</a:t>
+              <a:t>기도하시더니</a:t>
             </a:r>
           </a:p>
         </p:txBody>
@@ -5345,7 +5411,7 @@
               </a:defRPr>
             </a:pPr>
             <a:r>
-              <a:t>말3:6</a:t>
+              <a:t>막1:35</a:t>
             </a:r>
           </a:p>
         </p:txBody>
@@ -5435,11 +5501,11 @@
               </a:defRPr>
             </a:pPr>
             <a:r>
-              <a:t>여호와께서 모세에게 이르시되 너는 어찌하여 내게 부르짖느냐 이스라엘 자손에게</a:t>
+              <a:t>주의 궁정에서의 한 날이 다른 곳에서의 천 날보다 나은즉 악인의 장막에 사는</a:t>
             </a:r>
             <a:br/>
             <a:r>
-              <a:t>명령하여 앞으로 나아가게 하고</a:t>
+              <a:t>것보다 내 하나님의 성전 문지기로 있는 것이 좋사오니</a:t>
             </a:r>
           </a:p>
         </p:txBody>
@@ -5477,7 +5543,7 @@
               </a:defRPr>
             </a:pPr>
             <a:r>
-              <a:t>출14:15</a:t>
+              <a:t>시84:10</a:t>
             </a:r>
           </a:p>
         </p:txBody>
@@ -5543,6 +5609,138 @@
 </file>
 
 <file path=ppt/slides/slide130.xml><?xml version="1.0" encoding="utf-8"?>
+<p:sld xmlns:a="http://schemas.openxmlformats.org/drawingml/2006/main" xmlns:p="http://schemas.openxmlformats.org/presentationml/2006/main" xmlns:r="http://schemas.openxmlformats.org/officeDocument/2006/relationships">
+  <p:cSld>
+    <p:bg>
+      <p:bgPr>
+        <a:solidFill>
+          <a:srgbClr val="00FF00"/>
+        </a:solidFill>
+        <a:effectLst/>
+      </p:bgPr>
+    </p:bg>
+    <p:spTree>
+      <p:nvGrpSpPr>
+        <p:cNvPr id="1" name=""/>
+        <p:cNvGrpSpPr/>
+        <p:nvPr/>
+      </p:nvGrpSpPr>
+      <p:grpSpPr/>
+      <p:sp>
+        <p:nvSpPr>
+          <p:cNvPr id="2" name="TextBox 1"/>
+          <p:cNvSpPr txBox="1"/>
+          <p:nvPr/>
+        </p:nvSpPr>
+        <p:spPr>
+          <a:xfrm>
+            <a:off x="0" y="5238000"/>
+            <a:ext cx="12193200" cy="1512000"/>
+          </a:xfrm>
+          <a:prstGeom prst="rect">
+            <a:avLst/>
+          </a:prstGeom>
+          <a:solidFill>
+            <a:srgbClr val="203864"/>
+          </a:solidFill>
+        </p:spPr>
+        <p:txBody>
+          <a:bodyPr wrap="none" anchor="ctr">
+            <a:normAutofit/>
+          </a:bodyPr>
+          <a:lstStyle/>
+          <a:p>
+            <a:pPr algn="l">
+              <a:defRPr sz="3000">
+                <a:solidFill>
+                  <a:srgbClr val="FFFFFF"/>
+                </a:solidFill>
+                <a:latin typeface="Pretendard Semibold"/>
+              </a:defRPr>
+            </a:pPr>
+            <a:r>
+              <a:t>하나님께 가까이 함이 내게 복이라 내가 주 여호와를 나의 피난처로 삼아 주의</a:t>
+            </a:r>
+            <a:br/>
+            <a:r>
+              <a:t>모든 행적을 전파하리이다</a:t>
+            </a:r>
+          </a:p>
+        </p:txBody>
+      </p:sp>
+      <p:sp>
+        <p:nvSpPr>
+          <p:cNvPr id="3" name="TextBox 2"/>
+          <p:cNvSpPr txBox="1"/>
+          <p:nvPr/>
+        </p:nvSpPr>
+        <p:spPr>
+          <a:xfrm>
+            <a:off x="0" y="4698000"/>
+            <a:ext cx="2880000" cy="540000"/>
+          </a:xfrm>
+          <a:prstGeom prst="rect">
+            <a:avLst/>
+          </a:prstGeom>
+          <a:solidFill>
+            <a:srgbClr val="FFFFFF"/>
+          </a:solidFill>
+        </p:spPr>
+        <p:txBody>
+          <a:bodyPr wrap="none" anchor="ctr">
+            <a:normAutofit/>
+          </a:bodyPr>
+          <a:lstStyle/>
+          <a:p>
+            <a:pPr algn="ctr">
+              <a:defRPr sz="2400">
+                <a:solidFill>
+                  <a:srgbClr val="000000"/>
+                </a:solidFill>
+                <a:latin typeface="Pretendard Black"/>
+              </a:defRPr>
+            </a:pPr>
+            <a:r>
+              <a:t>시73:28</a:t>
+            </a:r>
+          </a:p>
+        </p:txBody>
+      </p:sp>
+    </p:spTree>
+  </p:cSld>
+  <p:clrMapOvr>
+    <a:masterClrMapping/>
+  </p:clrMapOvr>
+</p:sld>
+</file>
+
+<file path=ppt/slides/slide131.xml><?xml version="1.0" encoding="utf-8"?>
+<p:sld xmlns:a="http://schemas.openxmlformats.org/drawingml/2006/main" xmlns:p="http://schemas.openxmlformats.org/presentationml/2006/main" xmlns:r="http://schemas.openxmlformats.org/officeDocument/2006/relationships">
+  <p:cSld>
+    <p:bg>
+      <p:bgPr>
+        <a:solidFill>
+          <a:srgbClr val="00FF00"/>
+        </a:solidFill>
+        <a:effectLst/>
+      </p:bgPr>
+    </p:bg>
+    <p:spTree>
+      <p:nvGrpSpPr>
+        <p:cNvPr id="1" name=""/>
+        <p:cNvGrpSpPr/>
+        <p:nvPr/>
+      </p:nvGrpSpPr>
+      <p:grpSpPr/>
+    </p:spTree>
+  </p:cSld>
+  <p:clrMapOvr>
+    <a:masterClrMapping/>
+  </p:clrMapOvr>
+</p:sld>
+</file>
+
+<file path=ppt/slides/slide132.xml><?xml version="1.0" encoding="utf-8"?>
 <p:sld xmlns:a="http://schemas.openxmlformats.org/drawingml/2006/main" xmlns:p="http://schemas.openxmlformats.org/presentationml/2006/main" xmlns:r="http://schemas.openxmlformats.org/officeDocument/2006/relationships">
   <p:cSld>
     <p:bg>
@@ -5644,7 +5842,7 @@
 </p:sld>
 </file>
 
-<file path=ppt/slides/slide131.xml><?xml version="1.0" encoding="utf-8"?>
+<file path=ppt/slides/slide133.xml><?xml version="1.0" encoding="utf-8"?>
 <p:sld xmlns:a="http://schemas.openxmlformats.org/drawingml/2006/main" xmlns:p="http://schemas.openxmlformats.org/presentationml/2006/main" xmlns:r="http://schemas.openxmlformats.org/officeDocument/2006/relationships">
   <p:cSld>
     <p:bg>
@@ -5708,7 +5906,7 @@
 </p:sld>
 </file>
 
-<file path=ppt/slides/slide132.xml><?xml version="1.0" encoding="utf-8"?>
+<file path=ppt/slides/slide134.xml><?xml version="1.0" encoding="utf-8"?>
 <p:sld xmlns:a="http://schemas.openxmlformats.org/drawingml/2006/main" xmlns:p="http://schemas.openxmlformats.org/presentationml/2006/main" xmlns:r="http://schemas.openxmlformats.org/officeDocument/2006/relationships">
   <p:cSld>
     <p:bg>
@@ -5772,7 +5970,7 @@
 </p:sld>
 </file>
 
-<file path=ppt/slides/slide133.xml><?xml version="1.0" encoding="utf-8"?>
+<file path=ppt/slides/slide135.xml><?xml version="1.0" encoding="utf-8"?>
 <p:sld xmlns:a="http://schemas.openxmlformats.org/drawingml/2006/main" xmlns:p="http://schemas.openxmlformats.org/presentationml/2006/main" xmlns:r="http://schemas.openxmlformats.org/officeDocument/2006/relationships">
   <p:cSld>
     <p:bg>
@@ -5836,7 +6034,7 @@
 </p:sld>
 </file>
 
-<file path=ppt/slides/slide134.xml><?xml version="1.0" encoding="utf-8"?>
+<file path=ppt/slides/slide136.xml><?xml version="1.0" encoding="utf-8"?>
 <p:sld xmlns:a="http://schemas.openxmlformats.org/drawingml/2006/main" xmlns:p="http://schemas.openxmlformats.org/presentationml/2006/main" xmlns:r="http://schemas.openxmlformats.org/officeDocument/2006/relationships">
   <p:cSld>
     <p:bg>
@@ -5900,7 +6098,7 @@
 </p:sld>
 </file>
 
-<file path=ppt/slides/slide135.xml><?xml version="1.0" encoding="utf-8"?>
+<file path=ppt/slides/slide137.xml><?xml version="1.0" encoding="utf-8"?>
 <p:sld xmlns:a="http://schemas.openxmlformats.org/drawingml/2006/main" xmlns:p="http://schemas.openxmlformats.org/presentationml/2006/main" xmlns:r="http://schemas.openxmlformats.org/officeDocument/2006/relationships">
   <p:cSld>
     <p:bg>
@@ -5964,7 +6162,7 @@
 </p:sld>
 </file>
 
-<file path=ppt/slides/slide136.xml><?xml version="1.0" encoding="utf-8"?>
+<file path=ppt/slides/slide138.xml><?xml version="1.0" encoding="utf-8"?>
 <p:sld xmlns:a="http://schemas.openxmlformats.org/drawingml/2006/main" xmlns:p="http://schemas.openxmlformats.org/presentationml/2006/main" xmlns:r="http://schemas.openxmlformats.org/officeDocument/2006/relationships">
   <p:cSld>
     <p:bg>
@@ -6028,7 +6226,7 @@
 </p:sld>
 </file>
 
-<file path=ppt/slides/slide137.xml><?xml version="1.0" encoding="utf-8"?>
+<file path=ppt/slides/slide139.xml><?xml version="1.0" encoding="utf-8"?>
 <p:sld xmlns:a="http://schemas.openxmlformats.org/drawingml/2006/main" xmlns:p="http://schemas.openxmlformats.org/presentationml/2006/main" xmlns:r="http://schemas.openxmlformats.org/officeDocument/2006/relationships">
   <p:cSld>
     <p:bg>
@@ -6092,7 +6290,7 @@
 </p:sld>
 </file>
 
-<file path=ppt/slides/slide138.xml><?xml version="1.0" encoding="utf-8"?>
+<file path=ppt/slides/slide14.xml><?xml version="1.0" encoding="utf-8"?>
 <p:sld xmlns:a="http://schemas.openxmlformats.org/drawingml/2006/main" xmlns:p="http://schemas.openxmlformats.org/presentationml/2006/main" xmlns:r="http://schemas.openxmlformats.org/officeDocument/2006/relationships">
   <p:cSld>
     <p:bg>
@@ -6143,20 +6341,58 @@
               </a:defRPr>
             </a:pPr>
             <a:r>
-              <a:t>하나님 사랑의 눈으로</a:t>
-            </a:r>
-          </a:p>
-        </p:txBody>
-      </p:sp>
-    </p:spTree>
-  </p:cSld>
-  <p:clrMapOvr>
-    <a:masterClrMapping/>
-  </p:clrMapOvr>
-</p:sld>
-</file>
-
-<file path=ppt/slides/slide139.xml><?xml version="1.0" encoding="utf-8"?>
+              <a:t>(1)태산을 넘어 험곡에 가도</a:t>
+            </a:r>
+          </a:p>
+        </p:txBody>
+      </p:sp>
+      <p:sp>
+        <p:nvSpPr>
+          <p:cNvPr id="3" name="TextBox 2"/>
+          <p:cNvSpPr txBox="1"/>
+          <p:nvPr/>
+        </p:nvSpPr>
+        <p:spPr>
+          <a:xfrm>
+            <a:off x="8506800" y="4860000"/>
+            <a:ext cx="3060000" cy="540000"/>
+          </a:xfrm>
+          <a:prstGeom prst="rect">
+            <a:avLst/>
+          </a:prstGeom>
+          <a:solidFill>
+            <a:srgbClr val="FFFFFF"/>
+          </a:solidFill>
+        </p:spPr>
+        <p:txBody>
+          <a:bodyPr wrap="none" anchor="ctr">
+            <a:normAutofit/>
+          </a:bodyPr>
+          <a:lstStyle/>
+          <a:p>
+            <a:pPr algn="ctr">
+              <a:defRPr sz="2000">
+                <a:solidFill>
+                  <a:srgbClr val="000000"/>
+                </a:solidFill>
+                <a:latin typeface="Pretendard Black"/>
+              </a:defRPr>
+            </a:pPr>
+            <a:r>
+              <a:t>태산을 넘어 험곡에 가도</a:t>
+            </a:r>
+          </a:p>
+        </p:txBody>
+      </p:sp>
+    </p:spTree>
+  </p:cSld>
+  <p:clrMapOvr>
+    <a:masterClrMapping/>
+  </p:clrMapOvr>
+</p:sld>
+</file>
+
+<file path=ppt/slides/slide140.xml><?xml version="1.0" encoding="utf-8"?>
 <p:sld xmlns:a="http://schemas.openxmlformats.org/drawingml/2006/main" xmlns:p="http://schemas.openxmlformats.org/presentationml/2006/main" xmlns:r="http://schemas.openxmlformats.org/officeDocument/2006/relationships">
   <p:cSld>
     <p:bg>
@@ -6207,20 +6443,20 @@
               </a:defRPr>
             </a:pPr>
             <a:r>
-              <a:t>너를 어느때나 바라보시고</a:t>
-            </a:r>
-          </a:p>
-        </p:txBody>
-      </p:sp>
-    </p:spTree>
-  </p:cSld>
-  <p:clrMapOvr>
-    <a:masterClrMapping/>
-  </p:clrMapOvr>
-</p:sld>
-</file>
-
-<file path=ppt/slides/slide14.xml><?xml version="1.0" encoding="utf-8"?>
+              <a:t>하나님 사랑의 눈으로</a:t>
+            </a:r>
+          </a:p>
+        </p:txBody>
+      </p:sp>
+    </p:spTree>
+  </p:cSld>
+  <p:clrMapOvr>
+    <a:masterClrMapping/>
+  </p:clrMapOvr>
+</p:sld>
+</file>
+
+<file path=ppt/slides/slide141.xml><?xml version="1.0" encoding="utf-8"?>
 <p:sld xmlns:a="http://schemas.openxmlformats.org/drawingml/2006/main" xmlns:p="http://schemas.openxmlformats.org/presentationml/2006/main" xmlns:r="http://schemas.openxmlformats.org/officeDocument/2006/relationships">
   <p:cSld>
     <p:bg>
@@ -6271,58 +6507,20 @@
               </a:defRPr>
             </a:pPr>
             <a:r>
-              <a:t>(1)태산을 넘어 험곡에 가도</a:t>
-            </a:r>
-          </a:p>
-        </p:txBody>
-      </p:sp>
-      <p:sp>
-        <p:nvSpPr>
-          <p:cNvPr id="3" name="TextBox 2"/>
-          <p:cNvSpPr txBox="1"/>
-          <p:nvPr/>
-        </p:nvSpPr>
-        <p:spPr>
-          <a:xfrm>
-            <a:off x="8506800" y="4860000"/>
-            <a:ext cx="3060000" cy="540000"/>
-          </a:xfrm>
-          <a:prstGeom prst="rect">
-            <a:avLst/>
-          </a:prstGeom>
-          <a:solidFill>
-            <a:srgbClr val="FFFFFF"/>
-          </a:solidFill>
-        </p:spPr>
-        <p:txBody>
-          <a:bodyPr wrap="none" anchor="ctr">
-            <a:normAutofit/>
-          </a:bodyPr>
-          <a:lstStyle/>
-          <a:p>
-            <a:pPr algn="ctr">
-              <a:defRPr sz="2000">
-                <a:solidFill>
-                  <a:srgbClr val="000000"/>
-                </a:solidFill>
-                <a:latin typeface="Pretendard Black"/>
-              </a:defRPr>
-            </a:pPr>
-            <a:r>
-              <a:t>태산을 넘어 험곡에 가도</a:t>
-            </a:r>
-          </a:p>
-        </p:txBody>
-      </p:sp>
-    </p:spTree>
-  </p:cSld>
-  <p:clrMapOvr>
-    <a:masterClrMapping/>
-  </p:clrMapOvr>
-</p:sld>
-</file>
-
-<file path=ppt/slides/slide140.xml><?xml version="1.0" encoding="utf-8"?>
+              <a:t>너를 어느때나 바라보시고</a:t>
+            </a:r>
+          </a:p>
+        </p:txBody>
+      </p:sp>
+    </p:spTree>
+  </p:cSld>
+  <p:clrMapOvr>
+    <a:masterClrMapping/>
+  </p:clrMapOvr>
+</p:sld>
+</file>
+
+<file path=ppt/slides/slide142.xml><?xml version="1.0" encoding="utf-8"?>
 <p:sld xmlns:a="http://schemas.openxmlformats.org/drawingml/2006/main" xmlns:p="http://schemas.openxmlformats.org/presentationml/2006/main" xmlns:r="http://schemas.openxmlformats.org/officeDocument/2006/relationships">
   <p:cSld>
     <p:bg>
@@ -6386,7 +6584,7 @@
 </p:sld>
 </file>
 
-<file path=ppt/slides/slide141.xml><?xml version="1.0" encoding="utf-8"?>
+<file path=ppt/slides/slide143.xml><?xml version="1.0" encoding="utf-8"?>
 <p:sld xmlns:a="http://schemas.openxmlformats.org/drawingml/2006/main" xmlns:p="http://schemas.openxmlformats.org/presentationml/2006/main" xmlns:r="http://schemas.openxmlformats.org/officeDocument/2006/relationships">
   <p:cSld>
     <p:bg>
@@ -6450,7 +6648,7 @@
 </p:sld>
 </file>
 
-<file path=ppt/slides/slide142.xml><?xml version="1.0" encoding="utf-8"?>
+<file path=ppt/slides/slide144.xml><?xml version="1.0" encoding="utf-8"?>
 <p:sld xmlns:a="http://schemas.openxmlformats.org/drawingml/2006/main" xmlns:p="http://schemas.openxmlformats.org/presentationml/2006/main" xmlns:r="http://schemas.openxmlformats.org/officeDocument/2006/relationships">
   <p:cSld>
     <p:bg>
@@ -6514,7 +6712,7 @@
 </p:sld>
 </file>
 
-<file path=ppt/slides/slide143.xml><?xml version="1.0" encoding="utf-8"?>
+<file path=ppt/slides/slide145.xml><?xml version="1.0" encoding="utf-8"?>
 <p:sld xmlns:a="http://schemas.openxmlformats.org/drawingml/2006/main" xmlns:p="http://schemas.openxmlformats.org/presentationml/2006/main" xmlns:r="http://schemas.openxmlformats.org/officeDocument/2006/relationships">
   <p:cSld>
     <p:bg>
@@ -6578,7 +6776,7 @@
 </p:sld>
 </file>
 
-<file path=ppt/slides/slide144.xml><?xml version="1.0" encoding="utf-8"?>
+<file path=ppt/slides/slide146.xml><?xml version="1.0" encoding="utf-8"?>
 <p:sld xmlns:a="http://schemas.openxmlformats.org/drawingml/2006/main" xmlns:p="http://schemas.openxmlformats.org/presentationml/2006/main" xmlns:r="http://schemas.openxmlformats.org/officeDocument/2006/relationships">
   <p:cSld>
     <p:bg>
@@ -6642,7 +6840,7 @@
 </p:sld>
 </file>
 
-<file path=ppt/slides/slide145.xml><?xml version="1.0" encoding="utf-8"?>
+<file path=ppt/slides/slide147.xml><?xml version="1.0" encoding="utf-8"?>
 <p:sld xmlns:a="http://schemas.openxmlformats.org/drawingml/2006/main" xmlns:p="http://schemas.openxmlformats.org/presentationml/2006/main" xmlns:r="http://schemas.openxmlformats.org/officeDocument/2006/relationships">
   <p:cSld>
     <p:bg>
@@ -6706,33 +6904,33 @@
 </p:sld>
 </file>
 
-<file path=ppt/slides/slide146.xml><?xml version="1.0" encoding="utf-8"?>
-<p:sld xmlns:a="http://schemas.openxmlformats.org/drawingml/2006/main" xmlns:p="http://schemas.openxmlformats.org/presentationml/2006/main" xmlns:r="http://schemas.openxmlformats.org/officeDocument/2006/relationships">
-  <p:cSld>
-    <p:bg>
-      <p:bgPr>
-        <a:solidFill>
-          <a:srgbClr val="00FF00"/>
-        </a:solidFill>
-        <a:effectLst/>
-      </p:bgPr>
-    </p:bg>
-    <p:spTree>
-      <p:nvGrpSpPr>
-        <p:cNvPr id="1" name=""/>
-        <p:cNvGrpSpPr/>
-        <p:nvPr/>
-      </p:nvGrpSpPr>
-      <p:grpSpPr/>
-    </p:spTree>
-  </p:cSld>
-  <p:clrMapOvr>
-    <a:masterClrMapping/>
-  </p:clrMapOvr>
-</p:sld>
-</file>
-
-<file path=ppt/slides/slide147.xml><?xml version="1.0" encoding="utf-8"?>
+<file path=ppt/slides/slide148.xml><?xml version="1.0" encoding="utf-8"?>
+<p:sld xmlns:a="http://schemas.openxmlformats.org/drawingml/2006/main" xmlns:p="http://schemas.openxmlformats.org/presentationml/2006/main" xmlns:r="http://schemas.openxmlformats.org/officeDocument/2006/relationships">
+  <p:cSld>
+    <p:bg>
+      <p:bgPr>
+        <a:solidFill>
+          <a:srgbClr val="00FF00"/>
+        </a:solidFill>
+        <a:effectLst/>
+      </p:bgPr>
+    </p:bg>
+    <p:spTree>
+      <p:nvGrpSpPr>
+        <p:cNvPr id="1" name=""/>
+        <p:cNvGrpSpPr/>
+        <p:nvPr/>
+      </p:nvGrpSpPr>
+      <p:grpSpPr/>
+    </p:spTree>
+  </p:cSld>
+  <p:clrMapOvr>
+    <a:masterClrMapping/>
+  </p:clrMapOvr>
+</p:sld>
+</file>
+
+<file path=ppt/slides/slide149.xml><?xml version="1.0" encoding="utf-8"?>
 <p:sld xmlns:a="http://schemas.openxmlformats.org/drawingml/2006/main" xmlns:p="http://schemas.openxmlformats.org/presentationml/2006/main" xmlns:r="http://schemas.openxmlformats.org/officeDocument/2006/relationships">
   <p:cSld>
     <p:bg>
@@ -6805,33 +7003,97 @@
 </p:sld>
 </file>
 
-<file path=ppt/slides/slide148.xml><?xml version="1.0" encoding="utf-8"?>
-<p:sld xmlns:a="http://schemas.openxmlformats.org/drawingml/2006/main" xmlns:p="http://schemas.openxmlformats.org/presentationml/2006/main" xmlns:r="http://schemas.openxmlformats.org/officeDocument/2006/relationships">
-  <p:cSld>
-    <p:bg>
-      <p:bgPr>
-        <a:solidFill>
-          <a:srgbClr val="00FF00"/>
-        </a:solidFill>
-        <a:effectLst/>
-      </p:bgPr>
-    </p:bg>
-    <p:spTree>
-      <p:nvGrpSpPr>
-        <p:cNvPr id="1" name=""/>
-        <p:cNvGrpSpPr/>
-        <p:nvPr/>
-      </p:nvGrpSpPr>
-      <p:grpSpPr/>
-    </p:spTree>
-  </p:cSld>
-  <p:clrMapOvr>
-    <a:masterClrMapping/>
-  </p:clrMapOvr>
-</p:sld>
-</file>
-
-<file path=ppt/slides/slide149.xml><?xml version="1.0" encoding="utf-8"?>
+<file path=ppt/slides/slide15.xml><?xml version="1.0" encoding="utf-8"?>
+<p:sld xmlns:a="http://schemas.openxmlformats.org/drawingml/2006/main" xmlns:p="http://schemas.openxmlformats.org/presentationml/2006/main" xmlns:r="http://schemas.openxmlformats.org/officeDocument/2006/relationships">
+  <p:cSld>
+    <p:bg>
+      <p:bgPr>
+        <a:solidFill>
+          <a:srgbClr val="00FF00"/>
+        </a:solidFill>
+        <a:effectLst/>
+      </p:bgPr>
+    </p:bg>
+    <p:spTree>
+      <p:nvGrpSpPr>
+        <p:cNvPr id="1" name=""/>
+        <p:cNvGrpSpPr/>
+        <p:nvPr/>
+      </p:nvGrpSpPr>
+      <p:grpSpPr/>
+      <p:sp>
+        <p:nvSpPr>
+          <p:cNvPr id="2" name="TextBox 1"/>
+          <p:cNvSpPr txBox="1"/>
+          <p:nvPr/>
+        </p:nvSpPr>
+        <p:spPr>
+          <a:xfrm>
+            <a:off x="624059" y="5400000"/>
+            <a:ext cx="10944000" cy="1188000"/>
+          </a:xfrm>
+          <a:prstGeom prst="rect">
+            <a:avLst/>
+          </a:prstGeom>
+          <a:solidFill>
+            <a:srgbClr val="203864"/>
+          </a:solidFill>
+        </p:spPr>
+        <p:txBody>
+          <a:bodyPr wrap="none" anchor="ctr">
+            <a:normAutofit/>
+          </a:bodyPr>
+          <a:lstStyle/>
+          <a:p>
+            <a:pPr algn="ctr">
+              <a:defRPr sz="3500">
+                <a:solidFill>
+                  <a:srgbClr val="FFFFFF"/>
+                </a:solidFill>
+                <a:latin typeface="Pretendard Semibold"/>
+              </a:defRPr>
+            </a:pPr>
+            <a:r>
+              <a:t>빛 가운데로 걸어가면</a:t>
+            </a:r>
+          </a:p>
+        </p:txBody>
+      </p:sp>
+    </p:spTree>
+  </p:cSld>
+  <p:clrMapOvr>
+    <a:masterClrMapping/>
+  </p:clrMapOvr>
+</p:sld>
+</file>
+
+<file path=ppt/slides/slide150.xml><?xml version="1.0" encoding="utf-8"?>
+<p:sld xmlns:a="http://schemas.openxmlformats.org/drawingml/2006/main" xmlns:p="http://schemas.openxmlformats.org/presentationml/2006/main" xmlns:r="http://schemas.openxmlformats.org/officeDocument/2006/relationships">
+  <p:cSld>
+    <p:bg>
+      <p:bgPr>
+        <a:solidFill>
+          <a:srgbClr val="00FF00"/>
+        </a:solidFill>
+        <a:effectLst/>
+      </p:bgPr>
+    </p:bg>
+    <p:spTree>
+      <p:nvGrpSpPr>
+        <p:cNvPr id="1" name=""/>
+        <p:cNvGrpSpPr/>
+        <p:nvPr/>
+      </p:nvGrpSpPr>
+      <p:grpSpPr/>
+    </p:spTree>
+  </p:cSld>
+  <p:clrMapOvr>
+    <a:masterClrMapping/>
+  </p:clrMapOvr>
+</p:sld>
+</file>
+
+<file path=ppt/slides/slide151.xml><?xml version="1.0" encoding="utf-8"?>
 <p:sld xmlns:a="http://schemas.openxmlformats.org/drawingml/2006/main" xmlns:p="http://schemas.openxmlformats.org/presentationml/2006/main" xmlns:r="http://schemas.openxmlformats.org/officeDocument/2006/relationships">
   <p:cSld>
     <p:bg>
@@ -6904,7 +7166,33 @@
 </p:sld>
 </file>
 
-<file path=ppt/slides/slide15.xml><?xml version="1.0" encoding="utf-8"?>
+<file path=ppt/slides/slide152.xml><?xml version="1.0" encoding="utf-8"?>
+<p:sld xmlns:a="http://schemas.openxmlformats.org/drawingml/2006/main" xmlns:p="http://schemas.openxmlformats.org/presentationml/2006/main" xmlns:r="http://schemas.openxmlformats.org/officeDocument/2006/relationships">
+  <p:cSld>
+    <p:bg>
+      <p:bgPr>
+        <a:solidFill>
+          <a:srgbClr val="00FF00"/>
+        </a:solidFill>
+        <a:effectLst/>
+      </p:bgPr>
+    </p:bg>
+    <p:spTree>
+      <p:nvGrpSpPr>
+        <p:cNvPr id="1" name=""/>
+        <p:cNvGrpSpPr/>
+        <p:nvPr/>
+      </p:nvGrpSpPr>
+      <p:grpSpPr/>
+    </p:spTree>
+  </p:cSld>
+  <p:clrMapOvr>
+    <a:masterClrMapping/>
+  </p:clrMapOvr>
+</p:sld>
+</file>
+
+<file path=ppt/slides/slide153.xml><?xml version="1.0" encoding="utf-8"?>
 <p:sld xmlns:a="http://schemas.openxmlformats.org/drawingml/2006/main" xmlns:p="http://schemas.openxmlformats.org/presentationml/2006/main" xmlns:r="http://schemas.openxmlformats.org/officeDocument/2006/relationships">
   <p:cSld>
     <p:bg>
@@ -6955,46 +7243,58 @@
               </a:defRPr>
             </a:pPr>
             <a:r>
-              <a:t>빛 가운데로 걸어가면</a:t>
-            </a:r>
-          </a:p>
-        </p:txBody>
-      </p:sp>
-    </p:spTree>
-  </p:cSld>
-  <p:clrMapOvr>
-    <a:masterClrMapping/>
-  </p:clrMapOvr>
-</p:sld>
-</file>
-
-<file path=ppt/slides/slide150.xml><?xml version="1.0" encoding="utf-8"?>
-<p:sld xmlns:a="http://schemas.openxmlformats.org/drawingml/2006/main" xmlns:p="http://schemas.openxmlformats.org/presentationml/2006/main" xmlns:r="http://schemas.openxmlformats.org/officeDocument/2006/relationships">
-  <p:cSld>
-    <p:bg>
-      <p:bgPr>
-        <a:solidFill>
-          <a:srgbClr val="00FF00"/>
-        </a:solidFill>
-        <a:effectLst/>
-      </p:bgPr>
-    </p:bg>
-    <p:spTree>
-      <p:nvGrpSpPr>
-        <p:cNvPr id="1" name=""/>
-        <p:cNvGrpSpPr/>
-        <p:nvPr/>
-      </p:nvGrpSpPr>
-      <p:grpSpPr/>
-    </p:spTree>
-  </p:cSld>
-  <p:clrMapOvr>
-    <a:masterClrMapping/>
-  </p:clrMapOvr>
-</p:sld>
-</file>
-
-<file path=ppt/slides/slide151.xml><?xml version="1.0" encoding="utf-8"?>
+              <a:t>오소서 진리의 성령님</a:t>
+            </a:r>
+          </a:p>
+        </p:txBody>
+      </p:sp>
+      <p:sp>
+        <p:nvSpPr>
+          <p:cNvPr id="3" name="TextBox 2"/>
+          <p:cNvSpPr txBox="1"/>
+          <p:nvPr/>
+        </p:nvSpPr>
+        <p:spPr>
+          <a:xfrm>
+            <a:off x="8506800" y="4860000"/>
+            <a:ext cx="3060000" cy="540000"/>
+          </a:xfrm>
+          <a:prstGeom prst="rect">
+            <a:avLst/>
+          </a:prstGeom>
+          <a:solidFill>
+            <a:srgbClr val="FFFFFF"/>
+          </a:solidFill>
+        </p:spPr>
+        <p:txBody>
+          <a:bodyPr wrap="none" anchor="ctr">
+            <a:normAutofit/>
+          </a:bodyPr>
+          <a:lstStyle/>
+          <a:p>
+            <a:pPr algn="ctr">
+              <a:defRPr sz="2000">
+                <a:solidFill>
+                  <a:srgbClr val="000000"/>
+                </a:solidFill>
+                <a:latin typeface="Pretendard Black"/>
+              </a:defRPr>
+            </a:pPr>
+            <a:r>
+              <a:t>부흥 2000</a:t>
+            </a:r>
+          </a:p>
+        </p:txBody>
+      </p:sp>
+    </p:spTree>
+  </p:cSld>
+  <p:clrMapOvr>
+    <a:masterClrMapping/>
+  </p:clrMapOvr>
+</p:sld>
+</file>
+
+<file path=ppt/slides/slide154.xml><?xml version="1.0" encoding="utf-8"?>
 <p:sld xmlns:a="http://schemas.openxmlformats.org/drawingml/2006/main" xmlns:p="http://schemas.openxmlformats.org/presentationml/2006/main" xmlns:r="http://schemas.openxmlformats.org/officeDocument/2006/relationships">
   <p:cSld>
     <p:bg>
@@ -7045,58 +7345,20 @@
               </a:defRPr>
             </a:pPr>
             <a:r>
-              <a:t>오소서 진리의 성령님</a:t>
-            </a:r>
-          </a:p>
-        </p:txBody>
-      </p:sp>
-      <p:sp>
-        <p:nvSpPr>
-          <p:cNvPr id="3" name="TextBox 2"/>
-          <p:cNvSpPr txBox="1"/>
-          <p:nvPr/>
-        </p:nvSpPr>
-        <p:spPr>
-          <a:xfrm>
-            <a:off x="8506800" y="4860000"/>
-            <a:ext cx="3060000" cy="540000"/>
-          </a:xfrm>
-          <a:prstGeom prst="rect">
-            <a:avLst/>
-          </a:prstGeom>
-          <a:solidFill>
-            <a:srgbClr val="FFFFFF"/>
-          </a:solidFill>
-        </p:spPr>
-        <p:txBody>
-          <a:bodyPr wrap="none" anchor="ctr">
-            <a:normAutofit/>
-          </a:bodyPr>
-          <a:lstStyle/>
-          <a:p>
-            <a:pPr algn="ctr">
-              <a:defRPr sz="2000">
-                <a:solidFill>
-                  <a:srgbClr val="000000"/>
-                </a:solidFill>
-                <a:latin typeface="Pretendard Black"/>
-              </a:defRPr>
-            </a:pPr>
-            <a:r>
-              <a:t>부흥 2000</a:t>
-            </a:r>
-          </a:p>
-        </p:txBody>
-      </p:sp>
-    </p:spTree>
-  </p:cSld>
-  <p:clrMapOvr>
-    <a:masterClrMapping/>
-  </p:clrMapOvr>
-</p:sld>
-</file>
-
-<file path=ppt/slides/slide152.xml><?xml version="1.0" encoding="utf-8"?>
+              <a:t>이 땅 흔들며 임하소서</a:t>
+            </a:r>
+          </a:p>
+        </p:txBody>
+      </p:sp>
+    </p:spTree>
+  </p:cSld>
+  <p:clrMapOvr>
+    <a:masterClrMapping/>
+  </p:clrMapOvr>
+</p:sld>
+</file>
+
+<file path=ppt/slides/slide155.xml><?xml version="1.0" encoding="utf-8"?>
 <p:sld xmlns:a="http://schemas.openxmlformats.org/drawingml/2006/main" xmlns:p="http://schemas.openxmlformats.org/presentationml/2006/main" xmlns:r="http://schemas.openxmlformats.org/officeDocument/2006/relationships">
   <p:cSld>
     <p:bg>
@@ -7147,20 +7409,20 @@
               </a:defRPr>
             </a:pPr>
             <a:r>
-              <a:t>이 땅 흔들며 임하소서</a:t>
-            </a:r>
-          </a:p>
-        </p:txBody>
-      </p:sp>
-    </p:spTree>
-  </p:cSld>
-  <p:clrMapOvr>
-    <a:masterClrMapping/>
-  </p:clrMapOvr>
-</p:sld>
-</file>
-
-<file path=ppt/slides/slide153.xml><?xml version="1.0" encoding="utf-8"?>
+              <a:t>거짓과 탐욕 죄악에 무너진</a:t>
+            </a:r>
+          </a:p>
+        </p:txBody>
+      </p:sp>
+    </p:spTree>
+  </p:cSld>
+  <p:clrMapOvr>
+    <a:masterClrMapping/>
+  </p:clrMapOvr>
+</p:sld>
+</file>
+
+<file path=ppt/slides/slide156.xml><?xml version="1.0" encoding="utf-8"?>
 <p:sld xmlns:a="http://schemas.openxmlformats.org/drawingml/2006/main" xmlns:p="http://schemas.openxmlformats.org/presentationml/2006/main" xmlns:r="http://schemas.openxmlformats.org/officeDocument/2006/relationships">
   <p:cSld>
     <p:bg>
@@ -7211,20 +7473,20 @@
               </a:defRPr>
             </a:pPr>
             <a:r>
-              <a:t>거짓과 탐욕 죄악에 무너진</a:t>
-            </a:r>
-          </a:p>
-        </p:txBody>
-      </p:sp>
-    </p:spTree>
-  </p:cSld>
-  <p:clrMapOvr>
-    <a:masterClrMapping/>
-  </p:clrMapOvr>
-</p:sld>
-</file>
-
-<file path=ppt/slides/slide154.xml><?xml version="1.0" encoding="utf-8"?>
+              <a:t>우리 가슴 정케 하소서</a:t>
+            </a:r>
+          </a:p>
+        </p:txBody>
+      </p:sp>
+    </p:spTree>
+  </p:cSld>
+  <p:clrMapOvr>
+    <a:masterClrMapping/>
+  </p:clrMapOvr>
+</p:sld>
+</file>
+
+<file path=ppt/slides/slide157.xml><?xml version="1.0" encoding="utf-8"?>
 <p:sld xmlns:a="http://schemas.openxmlformats.org/drawingml/2006/main" xmlns:p="http://schemas.openxmlformats.org/presentationml/2006/main" xmlns:r="http://schemas.openxmlformats.org/officeDocument/2006/relationships">
   <p:cSld>
     <p:bg>
@@ -7275,20 +7537,20 @@
               </a:defRPr>
             </a:pPr>
             <a:r>
-              <a:t>우리 가슴 정케 하소서</a:t>
-            </a:r>
-          </a:p>
-        </p:txBody>
-      </p:sp>
-    </p:spTree>
-  </p:cSld>
-  <p:clrMapOvr>
-    <a:masterClrMapping/>
-  </p:clrMapOvr>
-</p:sld>
-</file>
-
-<file path=ppt/slides/slide155.xml><?xml version="1.0" encoding="utf-8"?>
+              <a:t>오소서 은혜의 성령님</a:t>
+            </a:r>
+          </a:p>
+        </p:txBody>
+      </p:sp>
+    </p:spTree>
+  </p:cSld>
+  <p:clrMapOvr>
+    <a:masterClrMapping/>
+  </p:clrMapOvr>
+</p:sld>
+</file>
+
+<file path=ppt/slides/slide158.xml><?xml version="1.0" encoding="utf-8"?>
 <p:sld xmlns:a="http://schemas.openxmlformats.org/drawingml/2006/main" xmlns:p="http://schemas.openxmlformats.org/presentationml/2006/main" xmlns:r="http://schemas.openxmlformats.org/officeDocument/2006/relationships">
   <p:cSld>
     <p:bg>
@@ -7339,20 +7601,20 @@
               </a:defRPr>
             </a:pPr>
             <a:r>
-              <a:t>오소서 은혜의 성령님</a:t>
-            </a:r>
-          </a:p>
-        </p:txBody>
-      </p:sp>
-    </p:spTree>
-  </p:cSld>
-  <p:clrMapOvr>
-    <a:masterClrMapping/>
-  </p:clrMapOvr>
-</p:sld>
-</file>
-
-<file path=ppt/slides/slide156.xml><?xml version="1.0" encoding="utf-8"?>
+              <a:t>하늘 가르고 임하소서</a:t>
+            </a:r>
+          </a:p>
+        </p:txBody>
+      </p:sp>
+    </p:spTree>
+  </p:cSld>
+  <p:clrMapOvr>
+    <a:masterClrMapping/>
+  </p:clrMapOvr>
+</p:sld>
+</file>
+
+<file path=ppt/slides/slide159.xml><?xml version="1.0" encoding="utf-8"?>
 <p:sld xmlns:a="http://schemas.openxmlformats.org/drawingml/2006/main" xmlns:p="http://schemas.openxmlformats.org/presentationml/2006/main" xmlns:r="http://schemas.openxmlformats.org/officeDocument/2006/relationships">
   <p:cSld>
     <p:bg>
@@ -7403,20 +7665,20 @@
               </a:defRPr>
             </a:pPr>
             <a:r>
-              <a:t>하늘 가르고 임하소서</a:t>
-            </a:r>
-          </a:p>
-        </p:txBody>
-      </p:sp>
-    </p:spTree>
-  </p:cSld>
-  <p:clrMapOvr>
-    <a:masterClrMapping/>
-  </p:clrMapOvr>
-</p:sld>
-</file>
-
-<file path=ppt/slides/slide157.xml><?xml version="1.0" encoding="utf-8"?>
+              <a:t>거룩한 불꽃 하늘로서 임하사</a:t>
+            </a:r>
+          </a:p>
+        </p:txBody>
+      </p:sp>
+    </p:spTree>
+  </p:cSld>
+  <p:clrMapOvr>
+    <a:masterClrMapping/>
+  </p:clrMapOvr>
+</p:sld>
+</file>
+
+<file path=ppt/slides/slide16.xml><?xml version="1.0" encoding="utf-8"?>
 <p:sld xmlns:a="http://schemas.openxmlformats.org/drawingml/2006/main" xmlns:p="http://schemas.openxmlformats.org/presentationml/2006/main" xmlns:r="http://schemas.openxmlformats.org/officeDocument/2006/relationships">
   <p:cSld>
     <p:bg>
@@ -7467,20 +7729,20 @@
               </a:defRPr>
             </a:pPr>
             <a:r>
-              <a:t>거룩한 불꽃 하늘로서 임하사</a:t>
-            </a:r>
-          </a:p>
-        </p:txBody>
-      </p:sp>
-    </p:spTree>
-  </p:cSld>
-  <p:clrMapOvr>
-    <a:masterClrMapping/>
-  </p:clrMapOvr>
-</p:sld>
-</file>
-
-<file path=ppt/slides/slide158.xml><?xml version="1.0" encoding="utf-8"?>
+              <a:t>주께서 항상 지키시기로</a:t>
+            </a:r>
+          </a:p>
+        </p:txBody>
+      </p:sp>
+    </p:spTree>
+  </p:cSld>
+  <p:clrMapOvr>
+    <a:masterClrMapping/>
+  </p:clrMapOvr>
+</p:sld>
+</file>
+
+<file path=ppt/slides/slide160.xml><?xml version="1.0" encoding="utf-8"?>
 <p:sld xmlns:a="http://schemas.openxmlformats.org/drawingml/2006/main" xmlns:p="http://schemas.openxmlformats.org/presentationml/2006/main" xmlns:r="http://schemas.openxmlformats.org/officeDocument/2006/relationships">
   <p:cSld>
     <p:bg>
@@ -7544,7 +7806,7 @@
 </p:sld>
 </file>
 
-<file path=ppt/slides/slide159.xml><?xml version="1.0" encoding="utf-8"?>
+<file path=ppt/slides/slide161.xml><?xml version="1.0" encoding="utf-8"?>
 <p:sld xmlns:a="http://schemas.openxmlformats.org/drawingml/2006/main" xmlns:p="http://schemas.openxmlformats.org/presentationml/2006/main" xmlns:r="http://schemas.openxmlformats.org/officeDocument/2006/relationships">
   <p:cSld>
     <p:bg>
@@ -7608,7 +7870,7 @@
 </p:sld>
 </file>
 
-<file path=ppt/slides/slide16.xml><?xml version="1.0" encoding="utf-8"?>
+<file path=ppt/slides/slide162.xml><?xml version="1.0" encoding="utf-8"?>
 <p:sld xmlns:a="http://schemas.openxmlformats.org/drawingml/2006/main" xmlns:p="http://schemas.openxmlformats.org/presentationml/2006/main" xmlns:r="http://schemas.openxmlformats.org/officeDocument/2006/relationships">
   <p:cSld>
     <p:bg>
@@ -7659,20 +7921,20 @@
               </a:defRPr>
             </a:pPr>
             <a:r>
-              <a:t>주께서 항상 지키시기로</a:t>
-            </a:r>
-          </a:p>
-        </p:txBody>
-      </p:sp>
-    </p:spTree>
-  </p:cSld>
-  <p:clrMapOvr>
-    <a:masterClrMapping/>
-  </p:clrMapOvr>
-</p:sld>
-</file>
-
-<file path=ppt/slides/slide160.xml><?xml version="1.0" encoding="utf-8"?>
+              <a:t>진리의 말씀 이땅 새롭게 하소서</a:t>
+            </a:r>
+          </a:p>
+        </p:txBody>
+      </p:sp>
+    </p:spTree>
+  </p:cSld>
+  <p:clrMapOvr>
+    <a:masterClrMapping/>
+  </p:clrMapOvr>
+</p:sld>
+</file>
+
+<file path=ppt/slides/slide163.xml><?xml version="1.0" encoding="utf-8"?>
 <p:sld xmlns:a="http://schemas.openxmlformats.org/drawingml/2006/main" xmlns:p="http://schemas.openxmlformats.org/presentationml/2006/main" xmlns:r="http://schemas.openxmlformats.org/officeDocument/2006/relationships">
   <p:cSld>
     <p:bg>
@@ -7723,20 +7985,20 @@
               </a:defRPr>
             </a:pPr>
             <a:r>
-              <a:t>진리의 말씀 이땅 새롭게 하소서</a:t>
-            </a:r>
-          </a:p>
-        </p:txBody>
-      </p:sp>
-    </p:spTree>
-  </p:cSld>
-  <p:clrMapOvr>
-    <a:masterClrMapping/>
-  </p:clrMapOvr>
-</p:sld>
-</file>
-
-<file path=ppt/slides/slide161.xml><?xml version="1.0" encoding="utf-8"?>
+              <a:t>은혜의 강물 흐르게 하소서</a:t>
+            </a:r>
+          </a:p>
+        </p:txBody>
+      </p:sp>
+    </p:spTree>
+  </p:cSld>
+  <p:clrMapOvr>
+    <a:masterClrMapping/>
+  </p:clrMapOvr>
+</p:sld>
+</file>
+
+<file path=ppt/slides/slide164.xml><?xml version="1.0" encoding="utf-8"?>
 <p:sld xmlns:a="http://schemas.openxmlformats.org/drawingml/2006/main" xmlns:p="http://schemas.openxmlformats.org/presentationml/2006/main" xmlns:r="http://schemas.openxmlformats.org/officeDocument/2006/relationships">
   <p:cSld>
     <p:bg>
@@ -7787,20 +8049,20 @@
               </a:defRPr>
             </a:pPr>
             <a:r>
-              <a:t>은혜의 강물 흐르게 하소서</a:t>
-            </a:r>
-          </a:p>
-        </p:txBody>
-      </p:sp>
-    </p:spTree>
-  </p:cSld>
-  <p:clrMapOvr>
-    <a:masterClrMapping/>
-  </p:clrMapOvr>
-</p:sld>
-</file>
-
-<file path=ppt/slides/slide162.xml><?xml version="1.0" encoding="utf-8"?>
+              <a:t>성령의 바람 이 땅 가득 불어와</a:t>
+            </a:r>
+          </a:p>
+        </p:txBody>
+      </p:sp>
+    </p:spTree>
+  </p:cSld>
+  <p:clrMapOvr>
+    <a:masterClrMapping/>
+  </p:clrMapOvr>
+</p:sld>
+</file>
+
+<file path=ppt/slides/slide165.xml><?xml version="1.0" encoding="utf-8"?>
 <p:sld xmlns:a="http://schemas.openxmlformats.org/drawingml/2006/main" xmlns:p="http://schemas.openxmlformats.org/presentationml/2006/main" xmlns:r="http://schemas.openxmlformats.org/officeDocument/2006/relationships">
   <p:cSld>
     <p:bg>
@@ -7851,20 +8113,20 @@
               </a:defRPr>
             </a:pPr>
             <a:r>
-              <a:t>성령의 바람 이 땅 가득 불어와</a:t>
-            </a:r>
-          </a:p>
-        </p:txBody>
-      </p:sp>
-    </p:spTree>
-  </p:cSld>
-  <p:clrMapOvr>
-    <a:masterClrMapping/>
-  </p:clrMapOvr>
-</p:sld>
-</file>
-
-<file path=ppt/slides/slide163.xml><?xml version="1.0" encoding="utf-8"?>
+              <a:t>흰옷 입은 주의 순결한 백성</a:t>
+            </a:r>
+          </a:p>
+        </p:txBody>
+      </p:sp>
+    </p:spTree>
+  </p:cSld>
+  <p:clrMapOvr>
+    <a:masterClrMapping/>
+  </p:clrMapOvr>
+</p:sld>
+</file>
+
+<file path=ppt/slides/slide166.xml><?xml version="1.0" encoding="utf-8"?>
 <p:sld xmlns:a="http://schemas.openxmlformats.org/drawingml/2006/main" xmlns:p="http://schemas.openxmlformats.org/presentationml/2006/main" xmlns:r="http://schemas.openxmlformats.org/officeDocument/2006/relationships">
   <p:cSld>
     <p:bg>
@@ -7915,20 +8177,20 @@
               </a:defRPr>
             </a:pPr>
             <a:r>
-              <a:t>흰옷 입은 주의 순결한 백성</a:t>
-            </a:r>
-          </a:p>
-        </p:txBody>
-      </p:sp>
-    </p:spTree>
-  </p:cSld>
-  <p:clrMapOvr>
-    <a:masterClrMapping/>
-  </p:clrMapOvr>
-</p:sld>
-</file>
-
-<file path=ppt/slides/slide164.xml><?xml version="1.0" encoding="utf-8"?>
+              <a:t>주의 영광위에 이제 일어나</a:t>
+            </a:r>
+          </a:p>
+        </p:txBody>
+      </p:sp>
+    </p:spTree>
+  </p:cSld>
+  <p:clrMapOvr>
+    <a:masterClrMapping/>
+  </p:clrMapOvr>
+</p:sld>
+</file>
+
+<file path=ppt/slides/slide167.xml><?xml version="1.0" encoding="utf-8"?>
 <p:sld xmlns:a="http://schemas.openxmlformats.org/drawingml/2006/main" xmlns:p="http://schemas.openxmlformats.org/presentationml/2006/main" xmlns:r="http://schemas.openxmlformats.org/officeDocument/2006/relationships">
   <p:cSld>
     <p:bg>
@@ -7979,20 +8241,20 @@
               </a:defRPr>
             </a:pPr>
             <a:r>
-              <a:t>주의 영광위에 이제 일어나</a:t>
-            </a:r>
-          </a:p>
-        </p:txBody>
-      </p:sp>
-    </p:spTree>
-  </p:cSld>
-  <p:clrMapOvr>
-    <a:masterClrMapping/>
-  </p:clrMapOvr>
-</p:sld>
-</file>
-
-<file path=ppt/slides/slide165.xml><?xml version="1.0" encoding="utf-8"?>
+              <a:t>열방을 치유하며 행진하는</a:t>
+            </a:r>
+          </a:p>
+        </p:txBody>
+      </p:sp>
+    </p:spTree>
+  </p:cSld>
+  <p:clrMapOvr>
+    <a:masterClrMapping/>
+  </p:clrMapOvr>
+</p:sld>
+</file>
+
+<file path=ppt/slides/slide168.xml><?xml version="1.0" encoding="utf-8"?>
 <p:sld xmlns:a="http://schemas.openxmlformats.org/drawingml/2006/main" xmlns:p="http://schemas.openxmlformats.org/presentationml/2006/main" xmlns:r="http://schemas.openxmlformats.org/officeDocument/2006/relationships">
   <p:cSld>
     <p:bg>
@@ -8043,20 +8305,20 @@
               </a:defRPr>
             </a:pPr>
             <a:r>
-              <a:t>열방을 치유하며 행진하는</a:t>
-            </a:r>
-          </a:p>
-        </p:txBody>
-      </p:sp>
-    </p:spTree>
-  </p:cSld>
-  <p:clrMapOvr>
-    <a:masterClrMapping/>
-  </p:clrMapOvr>
-</p:sld>
-</file>
-
-<file path=ppt/slides/slide166.xml><?xml version="1.0" encoding="utf-8"?>
+              <a:t>영광의 그 날을 주소서</a:t>
+            </a:r>
+          </a:p>
+        </p:txBody>
+      </p:sp>
+    </p:spTree>
+  </p:cSld>
+  <p:clrMapOvr>
+    <a:masterClrMapping/>
+  </p:clrMapOvr>
+</p:sld>
+</file>
+
+<file path=ppt/slides/slide169.xml><?xml version="1.0" encoding="utf-8"?>
 <p:sld xmlns:a="http://schemas.openxmlformats.org/drawingml/2006/main" xmlns:p="http://schemas.openxmlformats.org/presentationml/2006/main" xmlns:r="http://schemas.openxmlformats.org/officeDocument/2006/relationships">
   <p:cSld>
     <p:bg>
@@ -8107,20 +8369,20 @@
               </a:defRPr>
             </a:pPr>
             <a:r>
-              <a:t>영광의 그 날을 주소서</a:t>
-            </a:r>
-          </a:p>
-        </p:txBody>
-      </p:sp>
-    </p:spTree>
-  </p:cSld>
-  <p:clrMapOvr>
-    <a:masterClrMapping/>
-  </p:clrMapOvr>
-</p:sld>
-</file>
-
-<file path=ppt/slides/slide167.xml><?xml version="1.0" encoding="utf-8"?>
+              <a:t>부흥의 불길 타오르게 하소서</a:t>
+            </a:r>
+          </a:p>
+        </p:txBody>
+      </p:sp>
+    </p:spTree>
+  </p:cSld>
+  <p:clrMapOvr>
+    <a:masterClrMapping/>
+  </p:clrMapOvr>
+</p:sld>
+</file>
+
+<file path=ppt/slides/slide17.xml><?xml version="1.0" encoding="utf-8"?>
 <p:sld xmlns:a="http://schemas.openxmlformats.org/drawingml/2006/main" xmlns:p="http://schemas.openxmlformats.org/presentationml/2006/main" xmlns:r="http://schemas.openxmlformats.org/officeDocument/2006/relationships">
   <p:cSld>
     <p:bg>
@@ -8171,20 +8433,20 @@
               </a:defRPr>
             </a:pPr>
             <a:r>
-              <a:t>부흥의 불길 타오르게 하소서</a:t>
-            </a:r>
-          </a:p>
-        </p:txBody>
-      </p:sp>
-    </p:spTree>
-  </p:cSld>
-  <p:clrMapOvr>
-    <a:masterClrMapping/>
-  </p:clrMapOvr>
-</p:sld>
-</file>
-
-<file path=ppt/slides/slide168.xml><?xml version="1.0" encoding="utf-8"?>
+              <a:t>약속한 말씀 변치않네</a:t>
+            </a:r>
+          </a:p>
+        </p:txBody>
+      </p:sp>
+    </p:spTree>
+  </p:cSld>
+  <p:clrMapOvr>
+    <a:masterClrMapping/>
+  </p:clrMapOvr>
+</p:sld>
+</file>
+
+<file path=ppt/slides/slide170.xml><?xml version="1.0" encoding="utf-8"?>
 <p:sld xmlns:a="http://schemas.openxmlformats.org/drawingml/2006/main" xmlns:p="http://schemas.openxmlformats.org/presentationml/2006/main" xmlns:r="http://schemas.openxmlformats.org/officeDocument/2006/relationships">
   <p:cSld>
     <p:bg>
@@ -8248,7 +8510,7 @@
 </p:sld>
 </file>
 
-<file path=ppt/slides/slide169.xml><?xml version="1.0" encoding="utf-8"?>
+<file path=ppt/slides/slide171.xml><?xml version="1.0" encoding="utf-8"?>
 <p:sld xmlns:a="http://schemas.openxmlformats.org/drawingml/2006/main" xmlns:p="http://schemas.openxmlformats.org/presentationml/2006/main" xmlns:r="http://schemas.openxmlformats.org/officeDocument/2006/relationships">
   <p:cSld>
     <p:bg>
@@ -8312,7 +8574,7 @@
 </p:sld>
 </file>
 
-<file path=ppt/slides/slide17.xml><?xml version="1.0" encoding="utf-8"?>
+<file path=ppt/slides/slide172.xml><?xml version="1.0" encoding="utf-8"?>
 <p:sld xmlns:a="http://schemas.openxmlformats.org/drawingml/2006/main" xmlns:p="http://schemas.openxmlformats.org/presentationml/2006/main" xmlns:r="http://schemas.openxmlformats.org/officeDocument/2006/relationships">
   <p:cSld>
     <p:bg>
@@ -8363,20 +8625,20 @@
               </a:defRPr>
             </a:pPr>
             <a:r>
-              <a:t>약속한 말씀 변치않네</a:t>
-            </a:r>
-          </a:p>
-        </p:txBody>
-      </p:sp>
-    </p:spTree>
-  </p:cSld>
-  <p:clrMapOvr>
-    <a:masterClrMapping/>
-  </p:clrMapOvr>
-</p:sld>
-</file>
-
-<file path=ppt/slides/slide170.xml><?xml version="1.0" encoding="utf-8"?>
+              <a:t>성령의 바람 이 땅 가득 불어와</a:t>
+            </a:r>
+          </a:p>
+        </p:txBody>
+      </p:sp>
+    </p:spTree>
+  </p:cSld>
+  <p:clrMapOvr>
+    <a:masterClrMapping/>
+  </p:clrMapOvr>
+</p:sld>
+</file>
+
+<file path=ppt/slides/slide173.xml><?xml version="1.0" encoding="utf-8"?>
 <p:sld xmlns:a="http://schemas.openxmlformats.org/drawingml/2006/main" xmlns:p="http://schemas.openxmlformats.org/presentationml/2006/main" xmlns:r="http://schemas.openxmlformats.org/officeDocument/2006/relationships">
   <p:cSld>
     <p:bg>
@@ -8427,20 +8689,20 @@
               </a:defRPr>
             </a:pPr>
             <a:r>
-              <a:t>성령의 바람 이 땅 가득 불어와</a:t>
-            </a:r>
-          </a:p>
-        </p:txBody>
-      </p:sp>
-    </p:spTree>
-  </p:cSld>
-  <p:clrMapOvr>
-    <a:masterClrMapping/>
-  </p:clrMapOvr>
-</p:sld>
-</file>
-
-<file path=ppt/slides/slide171.xml><?xml version="1.0" encoding="utf-8"?>
+              <a:t>흰옷 입은 주의 순결한 백성</a:t>
+            </a:r>
+          </a:p>
+        </p:txBody>
+      </p:sp>
+    </p:spTree>
+  </p:cSld>
+  <p:clrMapOvr>
+    <a:masterClrMapping/>
+  </p:clrMapOvr>
+</p:sld>
+</file>
+
+<file path=ppt/slides/slide174.xml><?xml version="1.0" encoding="utf-8"?>
 <p:sld xmlns:a="http://schemas.openxmlformats.org/drawingml/2006/main" xmlns:p="http://schemas.openxmlformats.org/presentationml/2006/main" xmlns:r="http://schemas.openxmlformats.org/officeDocument/2006/relationships">
   <p:cSld>
     <p:bg>
@@ -8491,20 +8753,20 @@
               </a:defRPr>
             </a:pPr>
             <a:r>
-              <a:t>흰옷 입은 주의 순결한 백성</a:t>
-            </a:r>
-          </a:p>
-        </p:txBody>
-      </p:sp>
-    </p:spTree>
-  </p:cSld>
-  <p:clrMapOvr>
-    <a:masterClrMapping/>
-  </p:clrMapOvr>
-</p:sld>
-</file>
-
-<file path=ppt/slides/slide172.xml><?xml version="1.0" encoding="utf-8"?>
+              <a:t>주의 영광위해 이제 일어나</a:t>
+            </a:r>
+          </a:p>
+        </p:txBody>
+      </p:sp>
+    </p:spTree>
+  </p:cSld>
+  <p:clrMapOvr>
+    <a:masterClrMapping/>
+  </p:clrMapOvr>
+</p:sld>
+</file>
+
+<file path=ppt/slides/slide175.xml><?xml version="1.0" encoding="utf-8"?>
 <p:sld xmlns:a="http://schemas.openxmlformats.org/drawingml/2006/main" xmlns:p="http://schemas.openxmlformats.org/presentationml/2006/main" xmlns:r="http://schemas.openxmlformats.org/officeDocument/2006/relationships">
   <p:cSld>
     <p:bg>
@@ -8555,20 +8817,20 @@
               </a:defRPr>
             </a:pPr>
             <a:r>
-              <a:t>주의 영광위해 이제 일어나</a:t>
-            </a:r>
-          </a:p>
-        </p:txBody>
-      </p:sp>
-    </p:spTree>
-  </p:cSld>
-  <p:clrMapOvr>
-    <a:masterClrMapping/>
-  </p:clrMapOvr>
-</p:sld>
-</file>
-
-<file path=ppt/slides/slide173.xml><?xml version="1.0" encoding="utf-8"?>
+              <a:t>열방을 치유하며 행진하는</a:t>
+            </a:r>
+          </a:p>
+        </p:txBody>
+      </p:sp>
+    </p:spTree>
+  </p:cSld>
+  <p:clrMapOvr>
+    <a:masterClrMapping/>
+  </p:clrMapOvr>
+</p:sld>
+</file>
+
+<file path=ppt/slides/slide176.xml><?xml version="1.0" encoding="utf-8"?>
 <p:sld xmlns:a="http://schemas.openxmlformats.org/drawingml/2006/main" xmlns:p="http://schemas.openxmlformats.org/presentationml/2006/main" xmlns:r="http://schemas.openxmlformats.org/officeDocument/2006/relationships">
   <p:cSld>
     <p:bg>
@@ -8619,70 +8881,6 @@
               </a:defRPr>
             </a:pPr>
             <a:r>
-              <a:t>열방을 치유하며 행진하는</a:t>
-            </a:r>
-          </a:p>
-        </p:txBody>
-      </p:sp>
-    </p:spTree>
-  </p:cSld>
-  <p:clrMapOvr>
-    <a:masterClrMapping/>
-  </p:clrMapOvr>
-</p:sld>
-</file>
-
-<file path=ppt/slides/slide174.xml><?xml version="1.0" encoding="utf-8"?>
-<p:sld xmlns:a="http://schemas.openxmlformats.org/drawingml/2006/main" xmlns:p="http://schemas.openxmlformats.org/presentationml/2006/main" xmlns:r="http://schemas.openxmlformats.org/officeDocument/2006/relationships">
-  <p:cSld>
-    <p:bg>
-      <p:bgPr>
-        <a:solidFill>
-          <a:srgbClr val="00FF00"/>
-        </a:solidFill>
-        <a:effectLst/>
-      </p:bgPr>
-    </p:bg>
-    <p:spTree>
-      <p:nvGrpSpPr>
-        <p:cNvPr id="1" name=""/>
-        <p:cNvGrpSpPr/>
-        <p:nvPr/>
-      </p:nvGrpSpPr>
-      <p:grpSpPr/>
-      <p:sp>
-        <p:nvSpPr>
-          <p:cNvPr id="2" name="TextBox 1"/>
-          <p:cNvSpPr txBox="1"/>
-          <p:nvPr/>
-        </p:nvSpPr>
-        <p:spPr>
-          <a:xfrm>
-            <a:off x="624059" y="5400000"/>
-            <a:ext cx="10944000" cy="1188000"/>
-          </a:xfrm>
-          <a:prstGeom prst="rect">
-            <a:avLst/>
-          </a:prstGeom>
-          <a:solidFill>
-            <a:srgbClr val="203864"/>
-          </a:solidFill>
-        </p:spPr>
-        <p:txBody>
-          <a:bodyPr wrap="none" anchor="ctr">
-            <a:normAutofit/>
-          </a:bodyPr>
-          <a:lstStyle/>
-          <a:p>
-            <a:pPr algn="ctr">
-              <a:defRPr sz="3500">
-                <a:solidFill>
-                  <a:srgbClr val="FFFFFF"/>
-                </a:solidFill>
-                <a:latin typeface="Pretendard Semibold"/>
-              </a:defRPr>
-            </a:pPr>
-            <a:r>
               <a:t>영광의 그 날을 주소서</a:t>
             </a:r>
           </a:p>
@@ -8696,33 +8894,33 @@
 </p:sld>
 </file>
 
-<file path=ppt/slides/slide175.xml><?xml version="1.0" encoding="utf-8"?>
-<p:sld xmlns:a="http://schemas.openxmlformats.org/drawingml/2006/main" xmlns:p="http://schemas.openxmlformats.org/presentationml/2006/main" xmlns:r="http://schemas.openxmlformats.org/officeDocument/2006/relationships">
-  <p:cSld>
-    <p:bg>
-      <p:bgPr>
-        <a:solidFill>
-          <a:srgbClr val="00FF00"/>
-        </a:solidFill>
-        <a:effectLst/>
-      </p:bgPr>
-    </p:bg>
-    <p:spTree>
-      <p:nvGrpSpPr>
-        <p:cNvPr id="1" name=""/>
-        <p:cNvGrpSpPr/>
-        <p:nvPr/>
-      </p:nvGrpSpPr>
-      <p:grpSpPr/>
-    </p:spTree>
-  </p:cSld>
-  <p:clrMapOvr>
-    <a:masterClrMapping/>
-  </p:clrMapOvr>
-</p:sld>
-</file>
-
-<file path=ppt/slides/slide176.xml><?xml version="1.0" encoding="utf-8"?>
+<file path=ppt/slides/slide177.xml><?xml version="1.0" encoding="utf-8"?>
+<p:sld xmlns:a="http://schemas.openxmlformats.org/drawingml/2006/main" xmlns:p="http://schemas.openxmlformats.org/presentationml/2006/main" xmlns:r="http://schemas.openxmlformats.org/officeDocument/2006/relationships">
+  <p:cSld>
+    <p:bg>
+      <p:bgPr>
+        <a:solidFill>
+          <a:srgbClr val="00FF00"/>
+        </a:solidFill>
+        <a:effectLst/>
+      </p:bgPr>
+    </p:bg>
+    <p:spTree>
+      <p:nvGrpSpPr>
+        <p:cNvPr id="1" name=""/>
+        <p:cNvGrpSpPr/>
+        <p:nvPr/>
+      </p:nvGrpSpPr>
+      <p:grpSpPr/>
+    </p:spTree>
+  </p:cSld>
+  <p:clrMapOvr>
+    <a:masterClrMapping/>
+  </p:clrMapOvr>
+</p:sld>
+</file>
+
+<file path=ppt/slides/slide178.xml><?xml version="1.0" encoding="utf-8"?>
 <p:sld xmlns:a="http://schemas.openxmlformats.org/drawingml/2006/main" xmlns:p="http://schemas.openxmlformats.org/presentationml/2006/main" xmlns:r="http://schemas.openxmlformats.org/officeDocument/2006/relationships">
   <p:cSld>
     <p:bg>
@@ -8795,7 +8993,7 @@
 </p:sld>
 </file>
 
-<file path=ppt/slides/slide177.xml><?xml version="1.0" encoding="utf-8"?>
+<file path=ppt/slides/slide179.xml><?xml version="1.0" encoding="utf-8"?>
 <p:sld xmlns:a="http://schemas.openxmlformats.org/drawingml/2006/main" xmlns:p="http://schemas.openxmlformats.org/presentationml/2006/main" xmlns:r="http://schemas.openxmlformats.org/officeDocument/2006/relationships">
   <p:cSld>
     <p:bg>
@@ -13902,204 +14100,6 @@
     <p:bg>
       <p:bgPr>
         <a:solidFill>
-          <a:srgbClr val="000000"/>
-        </a:solidFill>
-        <a:effectLst/>
-      </p:bgPr>
-    </p:bg>
-    <p:spTree>
-      <p:nvGrpSpPr>
-        <p:cNvPr id="1" name=""/>
-        <p:cNvGrpSpPr/>
-        <p:nvPr/>
-      </p:nvGrpSpPr>
-      <p:grpSpPr/>
-      <p:sp>
-        <p:nvSpPr>
-          <p:cNvPr id="2" name="Rounded Rectangle 1"/>
-          <p:cNvSpPr/>
-          <p:nvPr/>
-        </p:nvSpPr>
-        <p:spPr>
-          <a:xfrm>
-            <a:off x="633600" y="5421600"/>
-            <a:ext cx="3823199" cy="658800"/>
-          </a:xfrm>
-          <a:prstGeom prst="roundRect">
-            <a:avLst/>
-          </a:prstGeom>
-          <a:solidFill>
-            <a:srgbClr val="203864"/>
-          </a:solidFill>
-        </p:spPr>
-        <p:style>
-          <a:lnRef idx="1">
-            <a:schemeClr val="accent1"/>
-          </a:lnRef>
-          <a:fillRef idx="3">
-            <a:schemeClr val="accent1"/>
-          </a:fillRef>
-          <a:effectRef idx="2">
-            <a:schemeClr val="accent1"/>
-          </a:effectRef>
-          <a:fontRef idx="minor">
-            <a:schemeClr val="lt1"/>
-          </a:fontRef>
-        </p:style>
-        <p:txBody>
-          <a:bodyPr rtlCol="0" anchor="ctr"/>
-          <a:lstStyle/>
-          <a:p>
-            <a:pPr algn="ctr">
-              <a:defRPr b="1" sz="3500">
-                <a:latin typeface="Pretendard Black"/>
-              </a:defRPr>
-            </a:pPr>
-            <a:r>
-              <a:t>통성기도</a:t>
-            </a:r>
-          </a:p>
-        </p:txBody>
-      </p:sp>
-    </p:spTree>
-  </p:cSld>
-  <p:clrMapOvr>
-    <a:masterClrMapping/>
-  </p:clrMapOvr>
-</p:sld>
-</file>
-
-<file path=ppt/slides/slide91.xml><?xml version="1.0" encoding="utf-8"?>
-<p:sld xmlns:a="http://schemas.openxmlformats.org/drawingml/2006/main" xmlns:p="http://schemas.openxmlformats.org/presentationml/2006/main" xmlns:r="http://schemas.openxmlformats.org/officeDocument/2006/relationships">
-  <p:cSld>
-    <p:bg>
-      <p:bgPr>
-        <a:solidFill>
-          <a:srgbClr val="00FF00"/>
-        </a:solidFill>
-        <a:effectLst/>
-      </p:bgPr>
-    </p:bg>
-    <p:spTree>
-      <p:nvGrpSpPr>
-        <p:cNvPr id="1" name=""/>
-        <p:cNvGrpSpPr/>
-        <p:nvPr/>
-      </p:nvGrpSpPr>
-      <p:grpSpPr/>
-    </p:spTree>
-  </p:cSld>
-  <p:clrMapOvr>
-    <a:masterClrMapping/>
-  </p:clrMapOvr>
-</p:sld>
-</file>
-
-<file path=ppt/slides/slide92.xml><?xml version="1.0" encoding="utf-8"?>
-<p:sld xmlns:a="http://schemas.openxmlformats.org/drawingml/2006/main" xmlns:p="http://schemas.openxmlformats.org/presentationml/2006/main" xmlns:r="http://schemas.openxmlformats.org/officeDocument/2006/relationships">
-  <p:cSld>
-    <p:bg>
-      <p:bgPr>
-        <a:solidFill>
-          <a:srgbClr val="00FF00"/>
-        </a:solidFill>
-        <a:effectLst/>
-      </p:bgPr>
-    </p:bg>
-    <p:spTree>
-      <p:nvGrpSpPr>
-        <p:cNvPr id="1" name=""/>
-        <p:cNvGrpSpPr/>
-        <p:nvPr/>
-      </p:nvGrpSpPr>
-      <p:grpSpPr/>
-      <p:sp>
-        <p:nvSpPr>
-          <p:cNvPr id="2" name="Rounded Rectangle 1"/>
-          <p:cNvSpPr/>
-          <p:nvPr/>
-        </p:nvSpPr>
-        <p:spPr>
-          <a:xfrm>
-            <a:off x="633600" y="5421600"/>
-            <a:ext cx="3823199" cy="658800"/>
-          </a:xfrm>
-          <a:prstGeom prst="roundRect">
-            <a:avLst/>
-          </a:prstGeom>
-          <a:solidFill>
-            <a:srgbClr val="203864"/>
-          </a:solidFill>
-        </p:spPr>
-        <p:style>
-          <a:lnRef idx="1">
-            <a:schemeClr val="accent1"/>
-          </a:lnRef>
-          <a:fillRef idx="3">
-            <a:schemeClr val="accent1"/>
-          </a:fillRef>
-          <a:effectRef idx="2">
-            <a:schemeClr val="accent1"/>
-          </a:effectRef>
-          <a:fontRef idx="minor">
-            <a:schemeClr val="lt1"/>
-          </a:fontRef>
-        </p:style>
-        <p:txBody>
-          <a:bodyPr rtlCol="0" anchor="ctr"/>
-          <a:lstStyle/>
-          <a:p>
-            <a:pPr algn="ctr">
-              <a:defRPr b="1" sz="3500">
-                <a:latin typeface="Pretendard Black"/>
-              </a:defRPr>
-            </a:pPr>
-            <a:r>
-              <a:t>대표기도</a:t>
-            </a:r>
-          </a:p>
-        </p:txBody>
-      </p:sp>
-    </p:spTree>
-  </p:cSld>
-  <p:clrMapOvr>
-    <a:masterClrMapping/>
-  </p:clrMapOvr>
-</p:sld>
-</file>
-
-<file path=ppt/slides/slide93.xml><?xml version="1.0" encoding="utf-8"?>
-<p:sld xmlns:a="http://schemas.openxmlformats.org/drawingml/2006/main" xmlns:p="http://schemas.openxmlformats.org/presentationml/2006/main" xmlns:r="http://schemas.openxmlformats.org/officeDocument/2006/relationships">
-  <p:cSld>
-    <p:bg>
-      <p:bgPr>
-        <a:solidFill>
-          <a:srgbClr val="00FF00"/>
-        </a:solidFill>
-        <a:effectLst/>
-      </p:bgPr>
-    </p:bg>
-    <p:spTree>
-      <p:nvGrpSpPr>
-        <p:cNvPr id="1" name=""/>
-        <p:cNvGrpSpPr/>
-        <p:nvPr/>
-      </p:nvGrpSpPr>
-      <p:grpSpPr/>
-    </p:spTree>
-  </p:cSld>
-  <p:clrMapOvr>
-    <a:masterClrMapping/>
-  </p:clrMapOvr>
-</p:sld>
-</file>
-
-<file path=ppt/slides/slide94.xml><?xml version="1.0" encoding="utf-8"?>
-<p:sld xmlns:a="http://schemas.openxmlformats.org/drawingml/2006/main" xmlns:p="http://schemas.openxmlformats.org/presentationml/2006/main" xmlns:r="http://schemas.openxmlformats.org/officeDocument/2006/relationships">
-  <p:cSld>
-    <p:bg>
-      <p:bgPr>
-        <a:solidFill>
           <a:srgbClr val="00FF00"/>
         </a:solidFill>
         <a:effectLst/>
@@ -14145,15 +14145,7 @@
               </a:defRPr>
             </a:pPr>
             <a:r>
-              <a:t>모세가 백성에게 이르되 너희는 두려워하지 말고 가만히 서서 여호와께서 오늘</a:t>
-            </a:r>
-            <a:br/>
-            <a:r>
-              <a:t>너희를 위하여 행하시는 구원을 보라 너희가 오늘 본 애굽 사람을 영원히 다시</a:t>
-            </a:r>
-            <a:br/>
-            <a:r>
-              <a:t>보지 아니하리라</a:t>
+              <a:t>오직 너희의 하나님 여호와께 가까이 하기를 오늘까지 행한 것 같이 하라</a:t>
             </a:r>
           </a:p>
         </p:txBody>
@@ -14191,20 +14183,20 @@
               </a:defRPr>
             </a:pPr>
             <a:r>
-              <a:t>출14:13</a:t>
-            </a:r>
-          </a:p>
-        </p:txBody>
-      </p:sp>
-    </p:spTree>
-  </p:cSld>
-  <p:clrMapOvr>
-    <a:masterClrMapping/>
-  </p:clrMapOvr>
-</p:sld>
-</file>
-
-<file path=ppt/slides/slide95.xml><?xml version="1.0" encoding="utf-8"?>
+              <a:t>수23:8</a:t>
+            </a:r>
+          </a:p>
+        </p:txBody>
+      </p:sp>
+    </p:spTree>
+  </p:cSld>
+  <p:clrMapOvr>
+    <a:masterClrMapping/>
+  </p:clrMapOvr>
+</p:sld>
+</file>
+
+<file path=ppt/slides/slide91.xml><?xml version="1.0" encoding="utf-8"?>
 <p:sld xmlns:a="http://schemas.openxmlformats.org/drawingml/2006/main" xmlns:p="http://schemas.openxmlformats.org/presentationml/2006/main" xmlns:r="http://schemas.openxmlformats.org/officeDocument/2006/relationships">
   <p:cSld>
     <p:bg>
@@ -14255,7 +14247,11 @@
               </a:defRPr>
             </a:pPr>
             <a:r>
-              <a:t>여호와께서 너희를 위하여 싸우시리니 너희는 가만히 있을지니라</a:t>
+              <a:t>이는 여호와께서 강대한 나라들을 너희의 앞에서 쫓아내셨으므로 오늘까지</a:t>
+            </a:r>
+            <a:br/>
+            <a:r>
+              <a:t>너희에게 맞선 자가 하나도 없었느니라</a:t>
             </a:r>
           </a:p>
         </p:txBody>
@@ -14293,46 +14289,254 @@
               </a:defRPr>
             </a:pPr>
             <a:r>
-              <a:t>출14:14</a:t>
-            </a:r>
-          </a:p>
-        </p:txBody>
-      </p:sp>
-    </p:spTree>
-  </p:cSld>
-  <p:clrMapOvr>
-    <a:masterClrMapping/>
-  </p:clrMapOvr>
-</p:sld>
-</file>
-
-<file path=ppt/slides/slide96.xml><?xml version="1.0" encoding="utf-8"?>
-<p:sld xmlns:a="http://schemas.openxmlformats.org/drawingml/2006/main" xmlns:p="http://schemas.openxmlformats.org/presentationml/2006/main" xmlns:r="http://schemas.openxmlformats.org/officeDocument/2006/relationships">
-  <p:cSld>
-    <p:bg>
-      <p:bgPr>
-        <a:solidFill>
-          <a:srgbClr val="00FF00"/>
-        </a:solidFill>
-        <a:effectLst/>
-      </p:bgPr>
-    </p:bg>
-    <p:spTree>
-      <p:nvGrpSpPr>
-        <p:cNvPr id="1" name=""/>
-        <p:cNvGrpSpPr/>
-        <p:nvPr/>
-      </p:nvGrpSpPr>
-      <p:grpSpPr/>
-    </p:spTree>
-  </p:cSld>
-  <p:clrMapOvr>
-    <a:masterClrMapping/>
-  </p:clrMapOvr>
-</p:sld>
-</file>
-
-<file path=ppt/slides/slide97.xml><?xml version="1.0" encoding="utf-8"?>
+              <a:t>수23:9</a:t>
+            </a:r>
+          </a:p>
+        </p:txBody>
+      </p:sp>
+    </p:spTree>
+  </p:cSld>
+  <p:clrMapOvr>
+    <a:masterClrMapping/>
+  </p:clrMapOvr>
+</p:sld>
+</file>
+
+<file path=ppt/slides/slide92.xml><?xml version="1.0" encoding="utf-8"?>
+<p:sld xmlns:a="http://schemas.openxmlformats.org/drawingml/2006/main" xmlns:p="http://schemas.openxmlformats.org/presentationml/2006/main" xmlns:r="http://schemas.openxmlformats.org/officeDocument/2006/relationships">
+  <p:cSld>
+    <p:bg>
+      <p:bgPr>
+        <a:solidFill>
+          <a:srgbClr val="00FF00"/>
+        </a:solidFill>
+        <a:effectLst/>
+      </p:bgPr>
+    </p:bg>
+    <p:spTree>
+      <p:nvGrpSpPr>
+        <p:cNvPr id="1" name=""/>
+        <p:cNvGrpSpPr/>
+        <p:nvPr/>
+      </p:nvGrpSpPr>
+      <p:grpSpPr/>
+      <p:sp>
+        <p:nvSpPr>
+          <p:cNvPr id="2" name="TextBox 1"/>
+          <p:cNvSpPr txBox="1"/>
+          <p:nvPr/>
+        </p:nvSpPr>
+        <p:spPr>
+          <a:xfrm>
+            <a:off x="0" y="5238000"/>
+            <a:ext cx="12193200" cy="1512000"/>
+          </a:xfrm>
+          <a:prstGeom prst="rect">
+            <a:avLst/>
+          </a:prstGeom>
+          <a:solidFill>
+            <a:srgbClr val="203864"/>
+          </a:solidFill>
+        </p:spPr>
+        <p:txBody>
+          <a:bodyPr wrap="none" anchor="ctr">
+            <a:normAutofit/>
+          </a:bodyPr>
+          <a:lstStyle/>
+          <a:p>
+            <a:pPr algn="l">
+              <a:defRPr sz="3000">
+                <a:solidFill>
+                  <a:srgbClr val="FFFFFF"/>
+                </a:solidFill>
+                <a:latin typeface="Pretendard Semibold"/>
+              </a:defRPr>
+            </a:pPr>
+            <a:r>
+              <a:t>너희 중 한 사람이 천 명을 쫓으리니 이는 너희의 하나님 여호와 그가</a:t>
+            </a:r>
+            <a:br/>
+            <a:r>
+              <a:t>너희에게 말씀하신 것 같이 너희를 위하여 싸우심이라</a:t>
+            </a:r>
+          </a:p>
+        </p:txBody>
+      </p:sp>
+      <p:sp>
+        <p:nvSpPr>
+          <p:cNvPr id="3" name="TextBox 2"/>
+          <p:cNvSpPr txBox="1"/>
+          <p:nvPr/>
+        </p:nvSpPr>
+        <p:spPr>
+          <a:xfrm>
+            <a:off x="0" y="4698000"/>
+            <a:ext cx="2880000" cy="540000"/>
+          </a:xfrm>
+          <a:prstGeom prst="rect">
+            <a:avLst/>
+          </a:prstGeom>
+          <a:solidFill>
+            <a:srgbClr val="FFFFFF"/>
+          </a:solidFill>
+        </p:spPr>
+        <p:txBody>
+          <a:bodyPr wrap="none" anchor="ctr">
+            <a:normAutofit/>
+          </a:bodyPr>
+          <a:lstStyle/>
+          <a:p>
+            <a:pPr algn="ctr">
+              <a:defRPr sz="2400">
+                <a:solidFill>
+                  <a:srgbClr val="000000"/>
+                </a:solidFill>
+                <a:latin typeface="Pretendard Black"/>
+              </a:defRPr>
+            </a:pPr>
+            <a:r>
+              <a:t>수23:10</a:t>
+            </a:r>
+          </a:p>
+        </p:txBody>
+      </p:sp>
+    </p:spTree>
+  </p:cSld>
+  <p:clrMapOvr>
+    <a:masterClrMapping/>
+  </p:clrMapOvr>
+</p:sld>
+</file>
+
+<file path=ppt/slides/slide93.xml><?xml version="1.0" encoding="utf-8"?>
+<p:sld xmlns:a="http://schemas.openxmlformats.org/drawingml/2006/main" xmlns:p="http://schemas.openxmlformats.org/presentationml/2006/main" xmlns:r="http://schemas.openxmlformats.org/officeDocument/2006/relationships">
+  <p:cSld>
+    <p:bg>
+      <p:bgPr>
+        <a:solidFill>
+          <a:srgbClr val="00FF00"/>
+        </a:solidFill>
+        <a:effectLst/>
+      </p:bgPr>
+    </p:bg>
+    <p:spTree>
+      <p:nvGrpSpPr>
+        <p:cNvPr id="1" name=""/>
+        <p:cNvGrpSpPr/>
+        <p:nvPr/>
+      </p:nvGrpSpPr>
+      <p:grpSpPr/>
+      <p:sp>
+        <p:nvSpPr>
+          <p:cNvPr id="2" name="TextBox 1"/>
+          <p:cNvSpPr txBox="1"/>
+          <p:nvPr/>
+        </p:nvSpPr>
+        <p:spPr>
+          <a:xfrm>
+            <a:off x="0" y="5238000"/>
+            <a:ext cx="12193200" cy="1512000"/>
+          </a:xfrm>
+          <a:prstGeom prst="rect">
+            <a:avLst/>
+          </a:prstGeom>
+          <a:solidFill>
+            <a:srgbClr val="203864"/>
+          </a:solidFill>
+        </p:spPr>
+        <p:txBody>
+          <a:bodyPr wrap="none" anchor="ctr">
+            <a:normAutofit/>
+          </a:bodyPr>
+          <a:lstStyle/>
+          <a:p>
+            <a:pPr algn="l">
+              <a:defRPr sz="3000">
+                <a:solidFill>
+                  <a:srgbClr val="FFFFFF"/>
+                </a:solidFill>
+                <a:latin typeface="Pretendard Semibold"/>
+              </a:defRPr>
+            </a:pPr>
+            <a:r>
+              <a:t>그러므로 스스로 조심하여 너희의 하나님 여호와를 사랑하라</a:t>
+            </a:r>
+          </a:p>
+        </p:txBody>
+      </p:sp>
+      <p:sp>
+        <p:nvSpPr>
+          <p:cNvPr id="3" name="TextBox 2"/>
+          <p:cNvSpPr txBox="1"/>
+          <p:nvPr/>
+        </p:nvSpPr>
+        <p:spPr>
+          <a:xfrm>
+            <a:off x="0" y="4698000"/>
+            <a:ext cx="2880000" cy="540000"/>
+          </a:xfrm>
+          <a:prstGeom prst="rect">
+            <a:avLst/>
+          </a:prstGeom>
+          <a:solidFill>
+            <a:srgbClr val="FFFFFF"/>
+          </a:solidFill>
+        </p:spPr>
+        <p:txBody>
+          <a:bodyPr wrap="none" anchor="ctr">
+            <a:normAutofit/>
+          </a:bodyPr>
+          <a:lstStyle/>
+          <a:p>
+            <a:pPr algn="ctr">
+              <a:defRPr sz="2400">
+                <a:solidFill>
+                  <a:srgbClr val="000000"/>
+                </a:solidFill>
+                <a:latin typeface="Pretendard Black"/>
+              </a:defRPr>
+            </a:pPr>
+            <a:r>
+              <a:t>수23:11</a:t>
+            </a:r>
+          </a:p>
+        </p:txBody>
+      </p:sp>
+    </p:spTree>
+  </p:cSld>
+  <p:clrMapOvr>
+    <a:masterClrMapping/>
+  </p:clrMapOvr>
+</p:sld>
+</file>
+
+<file path=ppt/slides/slide94.xml><?xml version="1.0" encoding="utf-8"?>
+<p:sld xmlns:a="http://schemas.openxmlformats.org/drawingml/2006/main" xmlns:p="http://schemas.openxmlformats.org/presentationml/2006/main" xmlns:r="http://schemas.openxmlformats.org/officeDocument/2006/relationships">
+  <p:cSld>
+    <p:bg>
+      <p:bgPr>
+        <a:solidFill>
+          <a:srgbClr val="00FF00"/>
+        </a:solidFill>
+        <a:effectLst/>
+      </p:bgPr>
+    </p:bg>
+    <p:spTree>
+      <p:nvGrpSpPr>
+        <p:cNvPr id="1" name=""/>
+        <p:cNvGrpSpPr/>
+        <p:nvPr/>
+      </p:nvGrpSpPr>
+      <p:grpSpPr/>
+    </p:spTree>
+  </p:cSld>
+  <p:clrMapOvr>
+    <a:masterClrMapping/>
+  </p:clrMapOvr>
+</p:sld>
+</file>
+
+<file path=ppt/slides/slide95.xml><?xml version="1.0" encoding="utf-8"?>
 <p:sld xmlns:a="http://schemas.openxmlformats.org/drawingml/2006/main" xmlns:p="http://schemas.openxmlformats.org/presentationml/2006/main" xmlns:r="http://schemas.openxmlformats.org/officeDocument/2006/relationships">
   <p:cSld>
     <p:bg>
@@ -14383,20 +14587,20 @@
               </a:defRPr>
             </a:pPr>
             <a:r>
-              <a:t>하나님이 우리를 당황하게 하실 때 (출애굽기 14:13–14)</a:t>
-            </a:r>
-          </a:p>
-        </p:txBody>
-      </p:sp>
-    </p:spTree>
-  </p:cSld>
-  <p:clrMapOvr>
-    <a:masterClrMapping/>
-  </p:clrMapOvr>
-</p:sld>
-</file>
-
-<file path=ppt/slides/slide98.xml><?xml version="1.0" encoding="utf-8"?>
+              <a:t>하나님께 딱 붙어 있으라 (여호수아 23:8~11)</a:t>
+            </a:r>
+          </a:p>
+        </p:txBody>
+      </p:sp>
+    </p:spTree>
+  </p:cSld>
+  <p:clrMapOvr>
+    <a:masterClrMapping/>
+  </p:clrMapOvr>
+</p:sld>
+</file>
+
+<file path=ppt/slides/slide96.xml><?xml version="1.0" encoding="utf-8"?>
 <p:sld xmlns:a="http://schemas.openxmlformats.org/drawingml/2006/main" xmlns:p="http://schemas.openxmlformats.org/presentationml/2006/main" xmlns:r="http://schemas.openxmlformats.org/officeDocument/2006/relationships">
   <p:cSld>
     <p:bg>
@@ -14447,15 +14651,7 @@
               </a:defRPr>
             </a:pPr>
             <a:r>
-              <a:t>모세가 백성에게 이르되 너희는 두려워하지 말고 가만히 서서 여호와께서 오늘</a:t>
-            </a:r>
-            <a:br/>
-            <a:r>
-              <a:t>너희를 위하여 행하시는 구원을 보라 너희가 오늘 본 애굽 사람을 영원히 다시</a:t>
-            </a:r>
-            <a:br/>
-            <a:r>
-              <a:t>보지 아니하리라</a:t>
+              <a:t>오직 너희의 하나님 여호와께 가까이 하기를 오늘까지 행한 것 같이 하라</a:t>
             </a:r>
           </a:p>
         </p:txBody>
@@ -14493,7 +14689,135 @@
               </a:defRPr>
             </a:pPr>
             <a:r>
-              <a:t>출14:13</a:t>
+              <a:t>수23:8</a:t>
+            </a:r>
+          </a:p>
+        </p:txBody>
+      </p:sp>
+    </p:spTree>
+  </p:cSld>
+  <p:clrMapOvr>
+    <a:masterClrMapping/>
+  </p:clrMapOvr>
+</p:sld>
+</file>
+
+<file path=ppt/slides/slide97.xml><?xml version="1.0" encoding="utf-8"?>
+<p:sld xmlns:a="http://schemas.openxmlformats.org/drawingml/2006/main" xmlns:p="http://schemas.openxmlformats.org/presentationml/2006/main" xmlns:r="http://schemas.openxmlformats.org/officeDocument/2006/relationships">
+  <p:cSld>
+    <p:bg>
+      <p:bgPr>
+        <a:solidFill>
+          <a:srgbClr val="00FF00"/>
+        </a:solidFill>
+        <a:effectLst/>
+      </p:bgPr>
+    </p:bg>
+    <p:spTree>
+      <p:nvGrpSpPr>
+        <p:cNvPr id="1" name=""/>
+        <p:cNvGrpSpPr/>
+        <p:nvPr/>
+      </p:nvGrpSpPr>
+      <p:grpSpPr/>
+    </p:spTree>
+  </p:cSld>
+  <p:clrMapOvr>
+    <a:masterClrMapping/>
+  </p:clrMapOvr>
+</p:sld>
+</file>
+
+<file path=ppt/slides/slide98.xml><?xml version="1.0" encoding="utf-8"?>
+<p:sld xmlns:a="http://schemas.openxmlformats.org/drawingml/2006/main" xmlns:p="http://schemas.openxmlformats.org/presentationml/2006/main" xmlns:r="http://schemas.openxmlformats.org/officeDocument/2006/relationships">
+  <p:cSld>
+    <p:bg>
+      <p:bgPr>
+        <a:solidFill>
+          <a:srgbClr val="00FF00"/>
+        </a:solidFill>
+        <a:effectLst/>
+      </p:bgPr>
+    </p:bg>
+    <p:spTree>
+      <p:nvGrpSpPr>
+        <p:cNvPr id="1" name=""/>
+        <p:cNvGrpSpPr/>
+        <p:nvPr/>
+      </p:nvGrpSpPr>
+      <p:grpSpPr/>
+      <p:sp>
+        <p:nvSpPr>
+          <p:cNvPr id="2" name="TextBox 1"/>
+          <p:cNvSpPr txBox="1"/>
+          <p:nvPr/>
+        </p:nvSpPr>
+        <p:spPr>
+          <a:xfrm>
+            <a:off x="0" y="5238000"/>
+            <a:ext cx="12193200" cy="1512000"/>
+          </a:xfrm>
+          <a:prstGeom prst="rect">
+            <a:avLst/>
+          </a:prstGeom>
+          <a:solidFill>
+            <a:srgbClr val="203864"/>
+          </a:solidFill>
+        </p:spPr>
+        <p:txBody>
+          <a:bodyPr wrap="none" anchor="ctr">
+            <a:normAutofit/>
+          </a:bodyPr>
+          <a:lstStyle/>
+          <a:p>
+            <a:pPr algn="l">
+              <a:defRPr sz="3000">
+                <a:solidFill>
+                  <a:srgbClr val="FFFFFF"/>
+                </a:solidFill>
+                <a:latin typeface="Pretendard Semibold"/>
+              </a:defRPr>
+            </a:pPr>
+            <a:r>
+              <a:t>이러므로 남자가 부모를 떠나 그의 아내와 합하여 둘이 한 몸을 이룰지로다</a:t>
+            </a:r>
+          </a:p>
+        </p:txBody>
+      </p:sp>
+      <p:sp>
+        <p:nvSpPr>
+          <p:cNvPr id="3" name="TextBox 2"/>
+          <p:cNvSpPr txBox="1"/>
+          <p:nvPr/>
+        </p:nvSpPr>
+        <p:spPr>
+          <a:xfrm>
+            <a:off x="0" y="4698000"/>
+            <a:ext cx="2880000" cy="540000"/>
+          </a:xfrm>
+          <a:prstGeom prst="rect">
+            <a:avLst/>
+          </a:prstGeom>
+          <a:solidFill>
+            <a:srgbClr val="FFFFFF"/>
+          </a:solidFill>
+        </p:spPr>
+        <p:txBody>
+          <a:bodyPr wrap="none" anchor="ctr">
+            <a:normAutofit/>
+          </a:bodyPr>
+          <a:lstStyle/>
+          <a:p>
+            <a:pPr algn="ctr">
+              <a:defRPr sz="2400">
+                <a:solidFill>
+                  <a:srgbClr val="000000"/>
+                </a:solidFill>
+                <a:latin typeface="Pretendard Black"/>
+              </a:defRPr>
+            </a:pPr>
+            <a:r>
+              <a:t>창2:24</a:t>
             </a:r>
           </a:p>
         </p:txBody>
